--- a/WorldWithWeb_AI_Trends_Session.pptx
+++ b/WorldWithWeb_AI_Trends_Session.pptx
@@ -4,6 +4,9 @@
   <p:sldMasterIdLst>
     <p:sldMasterId id="2147483648" r:id="rId1"/>
   </p:sldMasterIdLst>
+  <p:notesMasterIdLst>
+    <p:notesMasterId r:id="rId16"/>
+  </p:notesMasterIdLst>
   <p:sldIdLst>
     <p:sldId id="256" r:id="rId2"/>
     <p:sldId id="257" r:id="rId3"/>
@@ -136,6 +139,3518 @@
 </p:presentation>
 </file>
 
+<file path=ppt/notesMasters/notesMaster1.xml><?xml version="1.0" encoding="utf-8"?>
+<p:notesMaster xmlns:a="http://schemas.openxmlformats.org/drawingml/2006/main" xmlns:r="http://schemas.openxmlformats.org/officeDocument/2006/relationships" xmlns:p="http://schemas.openxmlformats.org/presentationml/2006/main">
+  <p:cSld>
+    <p:bg>
+      <p:bgRef idx="1001">
+        <a:schemeClr val="bg1"/>
+      </p:bgRef>
+    </p:bg>
+    <p:spTree>
+      <p:nvGrpSpPr>
+        <p:cNvPr id="1" name=""/>
+        <p:cNvGrpSpPr/>
+        <p:nvPr/>
+      </p:nvGrpSpPr>
+      <p:grpSpPr>
+        <a:xfrm>
+          <a:off x="0" y="0"/>
+          <a:ext cx="0" cy="0"/>
+          <a:chOff x="0" y="0"/>
+          <a:chExt cx="0" cy="0"/>
+        </a:xfrm>
+      </p:grpSpPr>
+      <p:sp>
+        <p:nvSpPr>
+          <p:cNvPr id="2" name="Header Placeholder 1"/>
+          <p:cNvSpPr>
+            <a:spLocks noGrp="1"/>
+          </p:cNvSpPr>
+          <p:nvPr>
+            <p:ph type="hdr" sz="quarter"/>
+          </p:nvPr>
+        </p:nvSpPr>
+        <p:spPr>
+          <a:xfrm>
+            <a:off x="0" y="0"/>
+            <a:ext cx="2971800" cy="458788"/>
+          </a:xfrm>
+          <a:prstGeom prst="rect">
+            <a:avLst/>
+          </a:prstGeom>
+        </p:spPr>
+        <p:txBody>
+          <a:bodyPr vert="horz" lIns="91440" tIns="45720" rIns="91440" bIns="45720" rtlCol="0"/>
+          <a:lstStyle>
+            <a:lvl1pPr algn="l">
+              <a:defRPr sz="1200"/>
+            </a:lvl1pPr>
+          </a:lstStyle>
+          <a:p>
+            <a:endParaRPr lang="en-IN"/>
+          </a:p>
+        </p:txBody>
+      </p:sp>
+      <p:sp>
+        <p:nvSpPr>
+          <p:cNvPr id="3" name="Date Placeholder 2"/>
+          <p:cNvSpPr>
+            <a:spLocks noGrp="1"/>
+          </p:cNvSpPr>
+          <p:nvPr>
+            <p:ph type="dt" idx="1"/>
+          </p:nvPr>
+        </p:nvSpPr>
+        <p:spPr>
+          <a:xfrm>
+            <a:off x="3884613" y="0"/>
+            <a:ext cx="2971800" cy="458788"/>
+          </a:xfrm>
+          <a:prstGeom prst="rect">
+            <a:avLst/>
+          </a:prstGeom>
+        </p:spPr>
+        <p:txBody>
+          <a:bodyPr vert="horz" lIns="91440" tIns="45720" rIns="91440" bIns="45720" rtlCol="0"/>
+          <a:lstStyle>
+            <a:lvl1pPr algn="r">
+              <a:defRPr sz="1200"/>
+            </a:lvl1pPr>
+          </a:lstStyle>
+          <a:p>
+            <a:fld id="{CE2669B2-51C4-48E8-8313-E468DEEFA2FB}" type="datetimeFigureOut">
+              <a:rPr lang="en-IN" smtClean="0"/>
+              <a:t>03-04-2026</a:t>
+            </a:fld>
+            <a:endParaRPr lang="en-IN"/>
+          </a:p>
+        </p:txBody>
+      </p:sp>
+      <p:sp>
+        <p:nvSpPr>
+          <p:cNvPr id="4" name="Slide Image Placeholder 3"/>
+          <p:cNvSpPr>
+            <a:spLocks noGrp="1" noRot="1" noChangeAspect="1"/>
+          </p:cNvSpPr>
+          <p:nvPr>
+            <p:ph type="sldImg" idx="2"/>
+          </p:nvPr>
+        </p:nvSpPr>
+        <p:spPr>
+          <a:xfrm>
+            <a:off x="685800" y="1143000"/>
+            <a:ext cx="5486400" cy="3086100"/>
+          </a:xfrm>
+          <a:prstGeom prst="rect">
+            <a:avLst/>
+          </a:prstGeom>
+          <a:noFill/>
+          <a:ln w="12700">
+            <a:solidFill>
+              <a:prstClr val="black"/>
+            </a:solidFill>
+          </a:ln>
+        </p:spPr>
+        <p:txBody>
+          <a:bodyPr vert="horz" lIns="91440" tIns="45720" rIns="91440" bIns="45720" rtlCol="0" anchor="ctr"/>
+          <a:lstStyle/>
+          <a:p>
+            <a:endParaRPr lang="en-IN"/>
+          </a:p>
+        </p:txBody>
+      </p:sp>
+      <p:sp>
+        <p:nvSpPr>
+          <p:cNvPr id="5" name="Notes Placeholder 4"/>
+          <p:cNvSpPr>
+            <a:spLocks noGrp="1"/>
+          </p:cNvSpPr>
+          <p:nvPr>
+            <p:ph type="body" sz="quarter" idx="3"/>
+          </p:nvPr>
+        </p:nvSpPr>
+        <p:spPr>
+          <a:xfrm>
+            <a:off x="685800" y="4400550"/>
+            <a:ext cx="5486400" cy="3600450"/>
+          </a:xfrm>
+          <a:prstGeom prst="rect">
+            <a:avLst/>
+          </a:prstGeom>
+        </p:spPr>
+        <p:txBody>
+          <a:bodyPr vert="horz" lIns="91440" tIns="45720" rIns="91440" bIns="45720" rtlCol="0"/>
+          <a:lstStyle/>
+          <a:p>
+            <a:pPr lvl="0"/>
+            <a:r>
+              <a:rPr lang="en-US"/>
+              <a:t>Click to edit Master text styles</a:t>
+            </a:r>
+          </a:p>
+          <a:p>
+            <a:pPr lvl="1"/>
+            <a:r>
+              <a:rPr lang="en-US"/>
+              <a:t>Second level</a:t>
+            </a:r>
+          </a:p>
+          <a:p>
+            <a:pPr lvl="2"/>
+            <a:r>
+              <a:rPr lang="en-US"/>
+              <a:t>Third level</a:t>
+            </a:r>
+          </a:p>
+          <a:p>
+            <a:pPr lvl="3"/>
+            <a:r>
+              <a:rPr lang="en-US"/>
+              <a:t>Fourth level</a:t>
+            </a:r>
+          </a:p>
+          <a:p>
+            <a:pPr lvl="4"/>
+            <a:r>
+              <a:rPr lang="en-US"/>
+              <a:t>Fifth level</a:t>
+            </a:r>
+            <a:endParaRPr lang="en-IN"/>
+          </a:p>
+        </p:txBody>
+      </p:sp>
+      <p:sp>
+        <p:nvSpPr>
+          <p:cNvPr id="6" name="Footer Placeholder 5"/>
+          <p:cNvSpPr>
+            <a:spLocks noGrp="1"/>
+          </p:cNvSpPr>
+          <p:nvPr>
+            <p:ph type="ftr" sz="quarter" idx="4"/>
+          </p:nvPr>
+        </p:nvSpPr>
+        <p:spPr>
+          <a:xfrm>
+            <a:off x="0" y="8685213"/>
+            <a:ext cx="2971800" cy="458787"/>
+          </a:xfrm>
+          <a:prstGeom prst="rect">
+            <a:avLst/>
+          </a:prstGeom>
+        </p:spPr>
+        <p:txBody>
+          <a:bodyPr vert="horz" lIns="91440" tIns="45720" rIns="91440" bIns="45720" rtlCol="0" anchor="b"/>
+          <a:lstStyle>
+            <a:lvl1pPr algn="l">
+              <a:defRPr sz="1200"/>
+            </a:lvl1pPr>
+          </a:lstStyle>
+          <a:p>
+            <a:endParaRPr lang="en-IN"/>
+          </a:p>
+        </p:txBody>
+      </p:sp>
+      <p:sp>
+        <p:nvSpPr>
+          <p:cNvPr id="7" name="Slide Number Placeholder 6"/>
+          <p:cNvSpPr>
+            <a:spLocks noGrp="1"/>
+          </p:cNvSpPr>
+          <p:nvPr>
+            <p:ph type="sldNum" sz="quarter" idx="5"/>
+          </p:nvPr>
+        </p:nvSpPr>
+        <p:spPr>
+          <a:xfrm>
+            <a:off x="3884613" y="8685213"/>
+            <a:ext cx="2971800" cy="458787"/>
+          </a:xfrm>
+          <a:prstGeom prst="rect">
+            <a:avLst/>
+          </a:prstGeom>
+        </p:spPr>
+        <p:txBody>
+          <a:bodyPr vert="horz" lIns="91440" tIns="45720" rIns="91440" bIns="45720" rtlCol="0" anchor="b"/>
+          <a:lstStyle>
+            <a:lvl1pPr algn="r">
+              <a:defRPr sz="1200"/>
+            </a:lvl1pPr>
+          </a:lstStyle>
+          <a:p>
+            <a:fld id="{6C7BAAA9-F324-46BB-A8DF-7D9DDBA16B5D}" type="slidenum">
+              <a:rPr lang="en-IN" smtClean="0"/>
+              <a:t>‹#›</a:t>
+            </a:fld>
+            <a:endParaRPr lang="en-IN"/>
+          </a:p>
+        </p:txBody>
+      </p:sp>
+    </p:spTree>
+    <p:extLst>
+      <p:ext uri="{BB962C8B-B14F-4D97-AF65-F5344CB8AC3E}">
+        <p14:creationId xmlns:p14="http://schemas.microsoft.com/office/powerpoint/2010/main" val="2424979227"/>
+      </p:ext>
+    </p:extLst>
+  </p:cSld>
+  <p:clrMap bg1="lt1" tx1="dk1" bg2="lt2" tx2="dk2" accent1="accent1" accent2="accent2" accent3="accent3" accent4="accent4" accent5="accent5" accent6="accent6" hlink="hlink" folHlink="folHlink"/>
+  <p:notesStyle>
+    <a:lvl1pPr marL="0" algn="l" defTabSz="914400" rtl="0" eaLnBrk="1" latinLnBrk="0" hangingPunct="1">
+      <a:defRPr sz="1200" kern="1200">
+        <a:solidFill>
+          <a:schemeClr val="tx1"/>
+        </a:solidFill>
+        <a:latin typeface="+mn-lt"/>
+        <a:ea typeface="+mn-ea"/>
+        <a:cs typeface="+mn-cs"/>
+      </a:defRPr>
+    </a:lvl1pPr>
+    <a:lvl2pPr marL="457200" algn="l" defTabSz="914400" rtl="0" eaLnBrk="1" latinLnBrk="0" hangingPunct="1">
+      <a:defRPr sz="1200" kern="1200">
+        <a:solidFill>
+          <a:schemeClr val="tx1"/>
+        </a:solidFill>
+        <a:latin typeface="+mn-lt"/>
+        <a:ea typeface="+mn-ea"/>
+        <a:cs typeface="+mn-cs"/>
+      </a:defRPr>
+    </a:lvl2pPr>
+    <a:lvl3pPr marL="914400" algn="l" defTabSz="914400" rtl="0" eaLnBrk="1" latinLnBrk="0" hangingPunct="1">
+      <a:defRPr sz="1200" kern="1200">
+        <a:solidFill>
+          <a:schemeClr val="tx1"/>
+        </a:solidFill>
+        <a:latin typeface="+mn-lt"/>
+        <a:ea typeface="+mn-ea"/>
+        <a:cs typeface="+mn-cs"/>
+      </a:defRPr>
+    </a:lvl3pPr>
+    <a:lvl4pPr marL="1371600" algn="l" defTabSz="914400" rtl="0" eaLnBrk="1" latinLnBrk="0" hangingPunct="1">
+      <a:defRPr sz="1200" kern="1200">
+        <a:solidFill>
+          <a:schemeClr val="tx1"/>
+        </a:solidFill>
+        <a:latin typeface="+mn-lt"/>
+        <a:ea typeface="+mn-ea"/>
+        <a:cs typeface="+mn-cs"/>
+      </a:defRPr>
+    </a:lvl4pPr>
+    <a:lvl5pPr marL="1828800" algn="l" defTabSz="914400" rtl="0" eaLnBrk="1" latinLnBrk="0" hangingPunct="1">
+      <a:defRPr sz="1200" kern="1200">
+        <a:solidFill>
+          <a:schemeClr val="tx1"/>
+        </a:solidFill>
+        <a:latin typeface="+mn-lt"/>
+        <a:ea typeface="+mn-ea"/>
+        <a:cs typeface="+mn-cs"/>
+      </a:defRPr>
+    </a:lvl5pPr>
+    <a:lvl6pPr marL="2286000" algn="l" defTabSz="914400" rtl="0" eaLnBrk="1" latinLnBrk="0" hangingPunct="1">
+      <a:defRPr sz="1200" kern="1200">
+        <a:solidFill>
+          <a:schemeClr val="tx1"/>
+        </a:solidFill>
+        <a:latin typeface="+mn-lt"/>
+        <a:ea typeface="+mn-ea"/>
+        <a:cs typeface="+mn-cs"/>
+      </a:defRPr>
+    </a:lvl6pPr>
+    <a:lvl7pPr marL="2743200" algn="l" defTabSz="914400" rtl="0" eaLnBrk="1" latinLnBrk="0" hangingPunct="1">
+      <a:defRPr sz="1200" kern="1200">
+        <a:solidFill>
+          <a:schemeClr val="tx1"/>
+        </a:solidFill>
+        <a:latin typeface="+mn-lt"/>
+        <a:ea typeface="+mn-ea"/>
+        <a:cs typeface="+mn-cs"/>
+      </a:defRPr>
+    </a:lvl7pPr>
+    <a:lvl8pPr marL="3200400" algn="l" defTabSz="914400" rtl="0" eaLnBrk="1" latinLnBrk="0" hangingPunct="1">
+      <a:defRPr sz="1200" kern="1200">
+        <a:solidFill>
+          <a:schemeClr val="tx1"/>
+        </a:solidFill>
+        <a:latin typeface="+mn-lt"/>
+        <a:ea typeface="+mn-ea"/>
+        <a:cs typeface="+mn-cs"/>
+      </a:defRPr>
+    </a:lvl8pPr>
+    <a:lvl9pPr marL="3657600" algn="l" defTabSz="914400" rtl="0" eaLnBrk="1" latinLnBrk="0" hangingPunct="1">
+      <a:defRPr sz="1200" kern="1200">
+        <a:solidFill>
+          <a:schemeClr val="tx1"/>
+        </a:solidFill>
+        <a:latin typeface="+mn-lt"/>
+        <a:ea typeface="+mn-ea"/>
+        <a:cs typeface="+mn-cs"/>
+      </a:defRPr>
+    </a:lvl9pPr>
+  </p:notesStyle>
+</p:notesMaster>
+</file>
+
+<file path=ppt/notesSlides/notesSlide1.xml><?xml version="1.0" encoding="utf-8"?>
+<p:notes xmlns:a="http://schemas.openxmlformats.org/drawingml/2006/main" xmlns:r="http://schemas.openxmlformats.org/officeDocument/2006/relationships" xmlns:p="http://schemas.openxmlformats.org/presentationml/2006/main">
+  <p:cSld>
+    <p:spTree>
+      <p:nvGrpSpPr>
+        <p:cNvPr id="1" name=""/>
+        <p:cNvGrpSpPr/>
+        <p:nvPr/>
+      </p:nvGrpSpPr>
+      <p:grpSpPr>
+        <a:xfrm>
+          <a:off x="0" y="0"/>
+          <a:ext cx="0" cy="0"/>
+          <a:chOff x="0" y="0"/>
+          <a:chExt cx="0" cy="0"/>
+        </a:xfrm>
+      </p:grpSpPr>
+      <p:sp>
+        <p:nvSpPr>
+          <p:cNvPr id="2" name="Slide Image Placeholder 1"/>
+          <p:cNvSpPr>
+            <a:spLocks noGrp="1" noRot="1" noChangeAspect="1"/>
+          </p:cNvSpPr>
+          <p:nvPr>
+            <p:ph type="sldImg"/>
+          </p:nvPr>
+        </p:nvSpPr>
+        <p:spPr/>
+      </p:sp>
+      <p:sp>
+        <p:nvSpPr>
+          <p:cNvPr id="3" name="Notes Placeholder 2"/>
+          <p:cNvSpPr>
+            <a:spLocks noGrp="1"/>
+          </p:cNvSpPr>
+          <p:nvPr>
+            <p:ph type="body" idx="1"/>
+          </p:nvPr>
+        </p:nvSpPr>
+        <p:spPr/>
+        <p:txBody>
+          <a:bodyPr/>
+          <a:lstStyle/>
+          <a:p>
+            <a:r>
+              <a:rPr lang="en-US" b="0" dirty="0">
+                <a:solidFill>
+                  <a:srgbClr val="CCCCCC"/>
+                </a:solidFill>
+                <a:effectLst/>
+                <a:latin typeface="Consolas" panose="020B0609020204030204" pitchFamily="49" charset="0"/>
+              </a:rPr>
+              <a:t>Welcome everyone. Quick round of introductions for new faces.</a:t>
+            </a:r>
+          </a:p>
+          <a:p>
+            <a:br>
+              <a:rPr lang="en-US" b="0" dirty="0">
+                <a:solidFill>
+                  <a:srgbClr val="CCCCCC"/>
+                </a:solidFill>
+                <a:effectLst/>
+                <a:latin typeface="Consolas" panose="020B0609020204030204" pitchFamily="49" charset="0"/>
+              </a:rPr>
+            </a:br>
+            <a:r>
+              <a:rPr lang="en-US" b="0" dirty="0">
+                <a:solidFill>
+                  <a:srgbClr val="CCCCCC"/>
+                </a:solidFill>
+                <a:effectLst/>
+                <a:latin typeface="Consolas" panose="020B0609020204030204" pitchFamily="49" charset="0"/>
+              </a:rPr>
+              <a:t>Interactive: "Name one thing you used today that has AI in it."</a:t>
+            </a:r>
+          </a:p>
+          <a:p>
+            <a:br>
+              <a:rPr lang="en-US" b="0" dirty="0">
+                <a:solidFill>
+                  <a:srgbClr val="CCCCCC"/>
+                </a:solidFill>
+                <a:effectLst/>
+                <a:latin typeface="Consolas" panose="020B0609020204030204" pitchFamily="49" charset="0"/>
+              </a:rPr>
+            </a:br>
+            <a:endParaRPr lang="en-IN" dirty="0"/>
+          </a:p>
+        </p:txBody>
+      </p:sp>
+      <p:sp>
+        <p:nvSpPr>
+          <p:cNvPr id="4" name="Slide Number Placeholder 3"/>
+          <p:cNvSpPr>
+            <a:spLocks noGrp="1"/>
+          </p:cNvSpPr>
+          <p:nvPr>
+            <p:ph type="sldNum" sz="quarter" idx="5"/>
+          </p:nvPr>
+        </p:nvSpPr>
+        <p:spPr/>
+        <p:txBody>
+          <a:bodyPr/>
+          <a:lstStyle/>
+          <a:p>
+            <a:fld id="{6C7BAAA9-F324-46BB-A8DF-7D9DDBA16B5D}" type="slidenum">
+              <a:rPr lang="en-IN" smtClean="0"/>
+              <a:t>1</a:t>
+            </a:fld>
+            <a:endParaRPr lang="en-IN"/>
+          </a:p>
+        </p:txBody>
+      </p:sp>
+    </p:spTree>
+    <p:extLst>
+      <p:ext uri="{BB962C8B-B14F-4D97-AF65-F5344CB8AC3E}">
+        <p14:creationId xmlns:p14="http://schemas.microsoft.com/office/powerpoint/2010/main" val="62094593"/>
+      </p:ext>
+    </p:extLst>
+  </p:cSld>
+  <p:clrMapOvr>
+    <a:masterClrMapping/>
+  </p:clrMapOvr>
+</p:notes>
+</file>
+
+<file path=ppt/notesSlides/notesSlide10.xml><?xml version="1.0" encoding="utf-8"?>
+<p:notes xmlns:a="http://schemas.openxmlformats.org/drawingml/2006/main" xmlns:r="http://schemas.openxmlformats.org/officeDocument/2006/relationships" xmlns:p="http://schemas.openxmlformats.org/presentationml/2006/main">
+  <p:cSld>
+    <p:spTree>
+      <p:nvGrpSpPr>
+        <p:cNvPr id="1" name=""/>
+        <p:cNvGrpSpPr/>
+        <p:nvPr/>
+      </p:nvGrpSpPr>
+      <p:grpSpPr>
+        <a:xfrm>
+          <a:off x="0" y="0"/>
+          <a:ext cx="0" cy="0"/>
+          <a:chOff x="0" y="0"/>
+          <a:chExt cx="0" cy="0"/>
+        </a:xfrm>
+      </p:grpSpPr>
+      <p:sp>
+        <p:nvSpPr>
+          <p:cNvPr id="2" name="Slide Image Placeholder 1"/>
+          <p:cNvSpPr>
+            <a:spLocks noGrp="1" noRot="1" noChangeAspect="1"/>
+          </p:cNvSpPr>
+          <p:nvPr>
+            <p:ph type="sldImg"/>
+          </p:nvPr>
+        </p:nvSpPr>
+        <p:spPr/>
+      </p:sp>
+      <p:sp>
+        <p:nvSpPr>
+          <p:cNvPr id="3" name="Notes Placeholder 2"/>
+          <p:cNvSpPr>
+            <a:spLocks noGrp="1"/>
+          </p:cNvSpPr>
+          <p:nvPr>
+            <p:ph type="body" idx="1"/>
+          </p:nvPr>
+        </p:nvSpPr>
+        <p:spPr/>
+        <p:txBody>
+          <a:bodyPr/>
+          <a:lstStyle/>
+          <a:p>
+            <a:r>
+              <a:rPr lang="en-US" b="0" dirty="0">
+                <a:solidFill>
+                  <a:srgbClr val="CCCCCC"/>
+                </a:solidFill>
+                <a:effectLst/>
+                <a:latin typeface="Consolas" panose="020B0609020204030204" pitchFamily="49" charset="0"/>
+              </a:rPr>
+              <a:t>| Type | Who They Are | Examples | Where It's Heading |</a:t>
+            </a:r>
+          </a:p>
+          <a:p>
+            <a:r>
+              <a:rPr lang="en-US" b="0" dirty="0">
+                <a:solidFill>
+                  <a:srgbClr val="CCCCCC"/>
+                </a:solidFill>
+                <a:effectLst/>
+                <a:latin typeface="Consolas" panose="020B0609020204030204" pitchFamily="49" charset="0"/>
+              </a:rPr>
+              <a:t>|------|-------------|----------|-------------------|</a:t>
+            </a:r>
+          </a:p>
+          <a:p>
+            <a:r>
+              <a:rPr lang="en-US" b="0" dirty="0">
+                <a:solidFill>
+                  <a:srgbClr val="CCCCCC"/>
+                </a:solidFill>
+                <a:effectLst/>
+                <a:latin typeface="Consolas" panose="020B0609020204030204" pitchFamily="49" charset="0"/>
+              </a:rPr>
+              <a:t>| </a:t>
+            </a:r>
+            <a:r>
+              <a:rPr lang="en-US" b="1" dirty="0">
+                <a:solidFill>
+                  <a:srgbClr val="569CD6"/>
+                </a:solidFill>
+                <a:effectLst/>
+                <a:latin typeface="Consolas" panose="020B0609020204030204" pitchFamily="49" charset="0"/>
+              </a:rPr>
+              <a:t>**AI Users**</a:t>
+            </a:r>
+            <a:r>
+              <a:rPr lang="en-US" b="0" dirty="0">
+                <a:solidFill>
+                  <a:srgbClr val="CCCCCC"/>
+                </a:solidFill>
+                <a:effectLst/>
+                <a:latin typeface="Consolas" panose="020B0609020204030204" pitchFamily="49" charset="0"/>
+              </a:rPr>
+              <a:t> | Use AI tools daily | Marketers, designers, writers, students | The minimum bar. Everyone will be here. |</a:t>
+            </a:r>
+          </a:p>
+          <a:p>
+            <a:r>
+              <a:rPr lang="en-US" b="0" dirty="0">
+                <a:solidFill>
+                  <a:srgbClr val="CCCCCC"/>
+                </a:solidFill>
+                <a:effectLst/>
+                <a:latin typeface="Consolas" panose="020B0609020204030204" pitchFamily="49" charset="0"/>
+              </a:rPr>
+              <a:t>| </a:t>
+            </a:r>
+            <a:r>
+              <a:rPr lang="en-US" b="1" dirty="0">
+                <a:solidFill>
+                  <a:srgbClr val="569CD6"/>
+                </a:solidFill>
+                <a:effectLst/>
+                <a:latin typeface="Consolas" panose="020B0609020204030204" pitchFamily="49" charset="0"/>
+              </a:rPr>
+              <a:t>**AI Builders**</a:t>
+            </a:r>
+            <a:r>
+              <a:rPr lang="en-US" b="0" dirty="0">
+                <a:solidFill>
+                  <a:srgbClr val="CCCCCC"/>
+                </a:solidFill>
+                <a:effectLst/>
+                <a:latin typeface="Consolas" panose="020B0609020204030204" pitchFamily="49" charset="0"/>
+              </a:rPr>
+              <a:t> | Build AI-powered products | Developers, data scientists, automation engineers | Where the money and demand is. |</a:t>
+            </a:r>
+          </a:p>
+          <a:p>
+            <a:r>
+              <a:rPr lang="en-US" b="0" dirty="0">
+                <a:solidFill>
+                  <a:srgbClr val="CCCCCC"/>
+                </a:solidFill>
+                <a:effectLst/>
+                <a:latin typeface="Consolas" panose="020B0609020204030204" pitchFamily="49" charset="0"/>
+              </a:rPr>
+              <a:t>| </a:t>
+            </a:r>
+            <a:r>
+              <a:rPr lang="en-US" b="1" dirty="0">
+                <a:solidFill>
+                  <a:srgbClr val="569CD6"/>
+                </a:solidFill>
+                <a:effectLst/>
+                <a:latin typeface="Consolas" panose="020B0609020204030204" pitchFamily="49" charset="0"/>
+              </a:rPr>
+              <a:t>**AI Strategists**</a:t>
+            </a:r>
+            <a:r>
+              <a:rPr lang="en-US" b="0" dirty="0">
+                <a:solidFill>
+                  <a:srgbClr val="CCCCCC"/>
+                </a:solidFill>
+                <a:effectLst/>
+                <a:latin typeface="Consolas" panose="020B0609020204030204" pitchFamily="49" charset="0"/>
+              </a:rPr>
+              <a:t> | Decide how organizations adopt AI | Product managers, CTOs, consultants, founders | Where the leadership is. |</a:t>
+            </a:r>
+          </a:p>
+          <a:p>
+            <a:br>
+              <a:rPr lang="en-US" b="0" dirty="0">
+                <a:solidFill>
+                  <a:srgbClr val="CCCCCC"/>
+                </a:solidFill>
+                <a:effectLst/>
+                <a:latin typeface="Consolas" panose="020B0609020204030204" pitchFamily="49" charset="0"/>
+              </a:rPr>
+            </a:br>
+            <a:r>
+              <a:rPr lang="en-US" b="0" dirty="0">
+                <a:solidFill>
+                  <a:srgbClr val="CCCCCC"/>
+                </a:solidFill>
+                <a:effectLst/>
+                <a:latin typeface="Consolas" panose="020B0609020204030204" pitchFamily="49" charset="0"/>
+              </a:rPr>
+              <a:t>Connect back to Session 1's "Three Levels" (User → Builder → Creator):</a:t>
+            </a:r>
+          </a:p>
+          <a:p>
+            <a:br>
+              <a:rPr lang="en-US" b="0" dirty="0">
+                <a:solidFill>
+                  <a:srgbClr val="CCCCCC"/>
+                </a:solidFill>
+                <a:effectLst/>
+                <a:latin typeface="Consolas" panose="020B0609020204030204" pitchFamily="49" charset="0"/>
+              </a:rPr>
+            </a:br>
+            <a:r>
+              <a:rPr lang="en-US" b="0" i="1" dirty="0">
+                <a:solidFill>
+                  <a:srgbClr val="CCCCCC"/>
+                </a:solidFill>
+                <a:effectLst/>
+                <a:latin typeface="Consolas" panose="020B0609020204030204" pitchFamily="49" charset="0"/>
+              </a:rPr>
+              <a:t>*"No matter which course you take at </a:t>
+            </a:r>
+            <a:r>
+              <a:rPr lang="en-US" b="0" i="1" dirty="0" err="1">
+                <a:solidFill>
+                  <a:srgbClr val="CCCCCC"/>
+                </a:solidFill>
+                <a:effectLst/>
+                <a:latin typeface="Consolas" panose="020B0609020204030204" pitchFamily="49" charset="0"/>
+              </a:rPr>
+              <a:t>WorldWithWeb</a:t>
+            </a:r>
+            <a:r>
+              <a:rPr lang="en-US" b="0" i="1" dirty="0">
+                <a:solidFill>
+                  <a:srgbClr val="CCCCCC"/>
+                </a:solidFill>
+                <a:effectLst/>
+                <a:latin typeface="Consolas" panose="020B0609020204030204" pitchFamily="49" charset="0"/>
+              </a:rPr>
+              <a:t> -- Python, marketing, design -- we move you from just using AI to building with it."*</a:t>
+            </a:r>
+            <a:endParaRPr lang="en-US" b="0" dirty="0">
+              <a:solidFill>
+                <a:srgbClr val="CCCCCC"/>
+              </a:solidFill>
+              <a:effectLst/>
+              <a:latin typeface="Consolas" panose="020B0609020204030204" pitchFamily="49" charset="0"/>
+            </a:endParaRPr>
+          </a:p>
+          <a:p>
+            <a:endParaRPr lang="en-IN" dirty="0"/>
+          </a:p>
+        </p:txBody>
+      </p:sp>
+      <p:sp>
+        <p:nvSpPr>
+          <p:cNvPr id="4" name="Slide Number Placeholder 3"/>
+          <p:cNvSpPr>
+            <a:spLocks noGrp="1"/>
+          </p:cNvSpPr>
+          <p:nvPr>
+            <p:ph type="sldNum" sz="quarter" idx="5"/>
+          </p:nvPr>
+        </p:nvSpPr>
+        <p:spPr/>
+        <p:txBody>
+          <a:bodyPr/>
+          <a:lstStyle/>
+          <a:p>
+            <a:fld id="{6C7BAAA9-F324-46BB-A8DF-7D9DDBA16B5D}" type="slidenum">
+              <a:rPr lang="en-IN" smtClean="0"/>
+              <a:t>10</a:t>
+            </a:fld>
+            <a:endParaRPr lang="en-IN"/>
+          </a:p>
+        </p:txBody>
+      </p:sp>
+    </p:spTree>
+    <p:extLst>
+      <p:ext uri="{BB962C8B-B14F-4D97-AF65-F5344CB8AC3E}">
+        <p14:creationId xmlns:p14="http://schemas.microsoft.com/office/powerpoint/2010/main" val="1114264796"/>
+      </p:ext>
+    </p:extLst>
+  </p:cSld>
+  <p:clrMapOvr>
+    <a:masterClrMapping/>
+  </p:clrMapOvr>
+</p:notes>
+</file>
+
+<file path=ppt/notesSlides/notesSlide11.xml><?xml version="1.0" encoding="utf-8"?>
+<p:notes xmlns:a="http://schemas.openxmlformats.org/drawingml/2006/main" xmlns:r="http://schemas.openxmlformats.org/officeDocument/2006/relationships" xmlns:p="http://schemas.openxmlformats.org/presentationml/2006/main">
+  <p:cSld>
+    <p:spTree>
+      <p:nvGrpSpPr>
+        <p:cNvPr id="1" name=""/>
+        <p:cNvGrpSpPr/>
+        <p:nvPr/>
+      </p:nvGrpSpPr>
+      <p:grpSpPr>
+        <a:xfrm>
+          <a:off x="0" y="0"/>
+          <a:ext cx="0" cy="0"/>
+          <a:chOff x="0" y="0"/>
+          <a:chExt cx="0" cy="0"/>
+        </a:xfrm>
+      </p:grpSpPr>
+      <p:sp>
+        <p:nvSpPr>
+          <p:cNvPr id="2" name="Slide Image Placeholder 1"/>
+          <p:cNvSpPr>
+            <a:spLocks noGrp="1" noRot="1" noChangeAspect="1"/>
+          </p:cNvSpPr>
+          <p:nvPr>
+            <p:ph type="sldImg"/>
+          </p:nvPr>
+        </p:nvSpPr>
+        <p:spPr/>
+      </p:sp>
+      <p:sp>
+        <p:nvSpPr>
+          <p:cNvPr id="3" name="Notes Placeholder 2"/>
+          <p:cNvSpPr>
+            <a:spLocks noGrp="1"/>
+          </p:cNvSpPr>
+          <p:nvPr>
+            <p:ph type="body" idx="1"/>
+          </p:nvPr>
+        </p:nvSpPr>
+        <p:spPr/>
+        <p:txBody>
+          <a:bodyPr/>
+          <a:lstStyle/>
+          <a:p>
+            <a:r>
+              <a:rPr lang="en-US" b="1" dirty="0">
+                <a:solidFill>
+                  <a:srgbClr val="569CD6"/>
+                </a:solidFill>
+                <a:effectLst/>
+                <a:latin typeface="Consolas" panose="020B0609020204030204" pitchFamily="49" charset="0"/>
+              </a:rPr>
+              <a:t>#### Python &amp; AI Track</a:t>
+            </a:r>
+            <a:endParaRPr lang="en-US" b="0" dirty="0">
+              <a:solidFill>
+                <a:srgbClr val="CCCCCC"/>
+              </a:solidFill>
+              <a:effectLst/>
+              <a:latin typeface="Consolas" panose="020B0609020204030204" pitchFamily="49" charset="0"/>
+            </a:endParaRPr>
+          </a:p>
+          <a:p>
+            <a:r>
+              <a:rPr lang="en-US" b="0" dirty="0">
+                <a:solidFill>
+                  <a:srgbClr val="6796E6"/>
+                </a:solidFill>
+                <a:effectLst/>
+                <a:latin typeface="Consolas" panose="020B0609020204030204" pitchFamily="49" charset="0"/>
+              </a:rPr>
+              <a:t>-</a:t>
+            </a:r>
+            <a:r>
+              <a:rPr lang="en-US" b="0" dirty="0">
+                <a:solidFill>
+                  <a:srgbClr val="CCCCCC"/>
+                </a:solidFill>
+                <a:effectLst/>
+                <a:latin typeface="Consolas" panose="020B0609020204030204" pitchFamily="49" charset="0"/>
+              </a:rPr>
+              <a:t> Build real AI-powered applications</a:t>
+            </a:r>
+          </a:p>
+          <a:p>
+            <a:r>
+              <a:rPr lang="en-US" b="0" dirty="0">
+                <a:solidFill>
+                  <a:srgbClr val="6796E6"/>
+                </a:solidFill>
+                <a:effectLst/>
+                <a:latin typeface="Consolas" panose="020B0609020204030204" pitchFamily="49" charset="0"/>
+              </a:rPr>
+              <a:t>-</a:t>
+            </a:r>
+            <a:r>
+              <a:rPr lang="en-US" b="0" dirty="0">
+                <a:solidFill>
+                  <a:srgbClr val="CCCCCC"/>
+                </a:solidFill>
+                <a:effectLst/>
+                <a:latin typeface="Consolas" panose="020B0609020204030204" pitchFamily="49" charset="0"/>
+              </a:rPr>
+              <a:t> 7 projects in 6 weeks -- chatbots, games, security tools</a:t>
+            </a:r>
+          </a:p>
+          <a:p>
+            <a:r>
+              <a:rPr lang="en-US" b="0" dirty="0">
+                <a:solidFill>
+                  <a:srgbClr val="6796E6"/>
+                </a:solidFill>
+                <a:effectLst/>
+                <a:latin typeface="Consolas" panose="020B0609020204030204" pitchFamily="49" charset="0"/>
+              </a:rPr>
+              <a:t>-</a:t>
+            </a:r>
+            <a:r>
+              <a:rPr lang="en-US" b="0" dirty="0">
+                <a:solidFill>
+                  <a:srgbClr val="CCCCCC"/>
+                </a:solidFill>
+                <a:effectLst/>
+                <a:latin typeface="Consolas" panose="020B0609020204030204" pitchFamily="49" charset="0"/>
+              </a:rPr>
+              <a:t> Learn to work WITH AI as a co-builder</a:t>
+            </a:r>
+          </a:p>
+          <a:p>
+            <a:r>
+              <a:rPr lang="en-US" b="0" dirty="0">
+                <a:solidFill>
+                  <a:srgbClr val="6796E6"/>
+                </a:solidFill>
+                <a:effectLst/>
+                <a:latin typeface="Consolas" panose="020B0609020204030204" pitchFamily="49" charset="0"/>
+              </a:rPr>
+              <a:t>-</a:t>
+            </a:r>
+            <a:r>
+              <a:rPr lang="en-US" b="0" dirty="0">
+                <a:solidFill>
+                  <a:srgbClr val="CCCCCC"/>
+                </a:solidFill>
+                <a:effectLst/>
+                <a:latin typeface="Consolas" panose="020B0609020204030204" pitchFamily="49" charset="0"/>
+              </a:rPr>
+              <a:t> Career paths: Developer, AI Engineer, Cybersecurity, Data Science</a:t>
+            </a:r>
+          </a:p>
+          <a:p>
+            <a:r>
+              <a:rPr lang="en-US" b="1" dirty="0">
+                <a:solidFill>
+                  <a:srgbClr val="569CD6"/>
+                </a:solidFill>
+                <a:effectLst/>
+                <a:latin typeface="Consolas" panose="020B0609020204030204" pitchFamily="49" charset="0"/>
+              </a:rPr>
+              <a:t>#### Digital Marketing Track</a:t>
+            </a:r>
+            <a:endParaRPr lang="en-US" b="0" dirty="0">
+              <a:solidFill>
+                <a:srgbClr val="CCCCCC"/>
+              </a:solidFill>
+              <a:effectLst/>
+              <a:latin typeface="Consolas" panose="020B0609020204030204" pitchFamily="49" charset="0"/>
+            </a:endParaRPr>
+          </a:p>
+          <a:p>
+            <a:r>
+              <a:rPr lang="en-US" b="0" dirty="0">
+                <a:solidFill>
+                  <a:srgbClr val="6796E6"/>
+                </a:solidFill>
+                <a:effectLst/>
+                <a:latin typeface="Consolas" panose="020B0609020204030204" pitchFamily="49" charset="0"/>
+              </a:rPr>
+              <a:t>-</a:t>
+            </a:r>
+            <a:r>
+              <a:rPr lang="en-US" b="0" dirty="0">
+                <a:solidFill>
+                  <a:srgbClr val="CCCCCC"/>
+                </a:solidFill>
+                <a:effectLst/>
+                <a:latin typeface="Consolas" panose="020B0609020204030204" pitchFamily="49" charset="0"/>
+              </a:rPr>
+              <a:t> Master AI-powered marketing tools</a:t>
+            </a:r>
+          </a:p>
+          <a:p>
+            <a:r>
+              <a:rPr lang="en-US" b="0" dirty="0">
+                <a:solidFill>
+                  <a:srgbClr val="6796E6"/>
+                </a:solidFill>
+                <a:effectLst/>
+                <a:latin typeface="Consolas" panose="020B0609020204030204" pitchFamily="49" charset="0"/>
+              </a:rPr>
+              <a:t>-</a:t>
+            </a:r>
+            <a:r>
+              <a:rPr lang="en-US" b="0" dirty="0">
+                <a:solidFill>
+                  <a:srgbClr val="CCCCCC"/>
+                </a:solidFill>
+                <a:effectLst/>
+                <a:latin typeface="Consolas" panose="020B0609020204030204" pitchFamily="49" charset="0"/>
+              </a:rPr>
+              <a:t> SEO, social media, content creation with AI</a:t>
+            </a:r>
+          </a:p>
+          <a:p>
+            <a:r>
+              <a:rPr lang="en-US" b="0" dirty="0">
+                <a:solidFill>
+                  <a:srgbClr val="6796E6"/>
+                </a:solidFill>
+                <a:effectLst/>
+                <a:latin typeface="Consolas" panose="020B0609020204030204" pitchFamily="49" charset="0"/>
+              </a:rPr>
+              <a:t>-</a:t>
+            </a:r>
+            <a:r>
+              <a:rPr lang="en-US" b="0" dirty="0">
+                <a:solidFill>
+                  <a:srgbClr val="CCCCCC"/>
+                </a:solidFill>
+                <a:effectLst/>
+                <a:latin typeface="Consolas" panose="020B0609020204030204" pitchFamily="49" charset="0"/>
+              </a:rPr>
+              <a:t> Build campaigns that outperform the competition</a:t>
+            </a:r>
+          </a:p>
+          <a:p>
+            <a:r>
+              <a:rPr lang="en-US" b="0" dirty="0">
+                <a:solidFill>
+                  <a:srgbClr val="6796E6"/>
+                </a:solidFill>
+                <a:effectLst/>
+                <a:latin typeface="Consolas" panose="020B0609020204030204" pitchFamily="49" charset="0"/>
+              </a:rPr>
+              <a:t>-</a:t>
+            </a:r>
+            <a:r>
+              <a:rPr lang="en-US" b="0" dirty="0">
+                <a:solidFill>
+                  <a:srgbClr val="CCCCCC"/>
+                </a:solidFill>
+                <a:effectLst/>
+                <a:latin typeface="Consolas" panose="020B0609020204030204" pitchFamily="49" charset="0"/>
+              </a:rPr>
+              <a:t> Career paths: Digital Marketer, Content Strategist, SEO Specialist, Social Media Manager</a:t>
+            </a:r>
+          </a:p>
+          <a:p>
+            <a:br>
+              <a:rPr lang="en-US" b="0" dirty="0">
+                <a:solidFill>
+                  <a:srgbClr val="CCCCCC"/>
+                </a:solidFill>
+                <a:effectLst/>
+                <a:latin typeface="Consolas" panose="020B0609020204030204" pitchFamily="49" charset="0"/>
+              </a:rPr>
+            </a:br>
+            <a:r>
+              <a:rPr lang="en-US" b="1" dirty="0">
+                <a:solidFill>
+                  <a:srgbClr val="569CD6"/>
+                </a:solidFill>
+                <a:effectLst/>
+                <a:latin typeface="Consolas" panose="020B0609020204030204" pitchFamily="49" charset="0"/>
+              </a:rPr>
+              <a:t>**Bottom line:**</a:t>
+            </a:r>
+            <a:r>
+              <a:rPr lang="en-US" b="0" dirty="0">
+                <a:solidFill>
+                  <a:srgbClr val="CCCCCC"/>
+                </a:solidFill>
+                <a:effectLst/>
+                <a:latin typeface="Consolas" panose="020B0609020204030204" pitchFamily="49" charset="0"/>
+              </a:rPr>
+              <a:t> </a:t>
+            </a:r>
+            <a:r>
+              <a:rPr lang="en-US" b="0" i="1" dirty="0">
+                <a:solidFill>
+                  <a:srgbClr val="CCCCCC"/>
+                </a:solidFill>
+                <a:effectLst/>
+                <a:latin typeface="Consolas" panose="020B0609020204030204" pitchFamily="49" charset="0"/>
+              </a:rPr>
+              <a:t>*"Both tracks make you an AI Builder, not just an AI User. That's the </a:t>
+            </a:r>
+            <a:r>
+              <a:rPr lang="en-US" b="0" i="1" dirty="0" err="1">
+                <a:solidFill>
+                  <a:srgbClr val="CCCCCC"/>
+                </a:solidFill>
+                <a:effectLst/>
+                <a:latin typeface="Consolas" panose="020B0609020204030204" pitchFamily="49" charset="0"/>
+              </a:rPr>
+              <a:t>WorldWithWeb</a:t>
+            </a:r>
+            <a:r>
+              <a:rPr lang="en-US" b="0" i="1" dirty="0">
+                <a:solidFill>
+                  <a:srgbClr val="CCCCCC"/>
+                </a:solidFill>
+                <a:effectLst/>
+                <a:latin typeface="Consolas" panose="020B0609020204030204" pitchFamily="49" charset="0"/>
+              </a:rPr>
+              <a:t> difference."*</a:t>
+            </a:r>
+            <a:endParaRPr lang="en-US" b="0" dirty="0">
+              <a:solidFill>
+                <a:srgbClr val="CCCCCC"/>
+              </a:solidFill>
+              <a:effectLst/>
+              <a:latin typeface="Consolas" panose="020B0609020204030204" pitchFamily="49" charset="0"/>
+            </a:endParaRPr>
+          </a:p>
+          <a:p>
+            <a:endParaRPr lang="en-IN" dirty="0"/>
+          </a:p>
+        </p:txBody>
+      </p:sp>
+      <p:sp>
+        <p:nvSpPr>
+          <p:cNvPr id="4" name="Slide Number Placeholder 3"/>
+          <p:cNvSpPr>
+            <a:spLocks noGrp="1"/>
+          </p:cNvSpPr>
+          <p:nvPr>
+            <p:ph type="sldNum" sz="quarter" idx="5"/>
+          </p:nvPr>
+        </p:nvSpPr>
+        <p:spPr/>
+        <p:txBody>
+          <a:bodyPr/>
+          <a:lstStyle/>
+          <a:p>
+            <a:fld id="{6C7BAAA9-F324-46BB-A8DF-7D9DDBA16B5D}" type="slidenum">
+              <a:rPr lang="en-IN" smtClean="0"/>
+              <a:t>12</a:t>
+            </a:fld>
+            <a:endParaRPr lang="en-IN"/>
+          </a:p>
+        </p:txBody>
+      </p:sp>
+    </p:spTree>
+    <p:extLst>
+      <p:ext uri="{BB962C8B-B14F-4D97-AF65-F5344CB8AC3E}">
+        <p14:creationId xmlns:p14="http://schemas.microsoft.com/office/powerpoint/2010/main" val="2612569276"/>
+      </p:ext>
+    </p:extLst>
+  </p:cSld>
+  <p:clrMapOvr>
+    <a:masterClrMapping/>
+  </p:clrMapOvr>
+</p:notes>
+</file>
+
+<file path=ppt/notesSlides/notesSlide12.xml><?xml version="1.0" encoding="utf-8"?>
+<p:notes xmlns:a="http://schemas.openxmlformats.org/drawingml/2006/main" xmlns:r="http://schemas.openxmlformats.org/officeDocument/2006/relationships" xmlns:p="http://schemas.openxmlformats.org/presentationml/2006/main">
+  <p:cSld>
+    <p:spTree>
+      <p:nvGrpSpPr>
+        <p:cNvPr id="1" name=""/>
+        <p:cNvGrpSpPr/>
+        <p:nvPr/>
+      </p:nvGrpSpPr>
+      <p:grpSpPr>
+        <a:xfrm>
+          <a:off x="0" y="0"/>
+          <a:ext cx="0" cy="0"/>
+          <a:chOff x="0" y="0"/>
+          <a:chExt cx="0" cy="0"/>
+        </a:xfrm>
+      </p:grpSpPr>
+      <p:sp>
+        <p:nvSpPr>
+          <p:cNvPr id="2" name="Slide Image Placeholder 1"/>
+          <p:cNvSpPr>
+            <a:spLocks noGrp="1" noRot="1" noChangeAspect="1"/>
+          </p:cNvSpPr>
+          <p:nvPr>
+            <p:ph type="sldImg"/>
+          </p:nvPr>
+        </p:nvSpPr>
+        <p:spPr/>
+      </p:sp>
+      <p:sp>
+        <p:nvSpPr>
+          <p:cNvPr id="3" name="Notes Placeholder 2"/>
+          <p:cNvSpPr>
+            <a:spLocks noGrp="1"/>
+          </p:cNvSpPr>
+          <p:nvPr>
+            <p:ph type="body" idx="1"/>
+          </p:nvPr>
+        </p:nvSpPr>
+        <p:spPr/>
+        <p:txBody>
+          <a:bodyPr/>
+          <a:lstStyle/>
+          <a:p>
+            <a:r>
+              <a:rPr lang="en-US" b="0" dirty="0">
+                <a:solidFill>
+                  <a:srgbClr val="CCCCCC"/>
+                </a:solidFill>
+                <a:effectLst/>
+                <a:latin typeface="Consolas" panose="020B0609020204030204" pitchFamily="49" charset="0"/>
+              </a:rPr>
+              <a:t>Go around the room. Each person picks the field that excited them most:</a:t>
+            </a:r>
+          </a:p>
+          <a:p>
+            <a:r>
+              <a:rPr lang="en-US" b="0" dirty="0">
+                <a:solidFill>
+                  <a:srgbClr val="6796E6"/>
+                </a:solidFill>
+                <a:effectLst/>
+                <a:latin typeface="Consolas" panose="020B0609020204030204" pitchFamily="49" charset="0"/>
+              </a:rPr>
+              <a:t>-</a:t>
+            </a:r>
+            <a:r>
+              <a:rPr lang="en-US" b="0" dirty="0">
+                <a:solidFill>
+                  <a:srgbClr val="CCCCCC"/>
+                </a:solidFill>
+                <a:effectLst/>
+                <a:latin typeface="Consolas" panose="020B0609020204030204" pitchFamily="49" charset="0"/>
+              </a:rPr>
+              <a:t> Coding? Marketing? Design? Security? Education?</a:t>
+            </a:r>
+          </a:p>
+          <a:p>
+            <a:br>
+              <a:rPr lang="en-US" b="0" dirty="0">
+                <a:solidFill>
+                  <a:srgbClr val="CCCCCC"/>
+                </a:solidFill>
+                <a:effectLst/>
+                <a:latin typeface="Consolas" panose="020B0609020204030204" pitchFamily="49" charset="0"/>
+              </a:rPr>
+            </a:br>
+            <a:r>
+              <a:rPr lang="en-US" b="0" dirty="0">
+                <a:solidFill>
+                  <a:srgbClr val="CCCCCC"/>
+                </a:solidFill>
+                <a:effectLst/>
+                <a:latin typeface="Consolas" panose="020B0609020204030204" pitchFamily="49" charset="0"/>
+              </a:rPr>
+              <a:t>For each answer, connect to a specific </a:t>
+            </a:r>
+            <a:r>
+              <a:rPr lang="en-US" b="0" dirty="0" err="1">
+                <a:solidFill>
+                  <a:srgbClr val="CCCCCC"/>
+                </a:solidFill>
+                <a:effectLst/>
+                <a:latin typeface="Consolas" panose="020B0609020204030204" pitchFamily="49" charset="0"/>
+              </a:rPr>
+              <a:t>WorldWithWeb</a:t>
+            </a:r>
+            <a:r>
+              <a:rPr lang="en-US" b="0" dirty="0">
+                <a:solidFill>
+                  <a:srgbClr val="CCCCCC"/>
+                </a:solidFill>
+                <a:effectLst/>
+                <a:latin typeface="Consolas" panose="020B0609020204030204" pitchFamily="49" charset="0"/>
+              </a:rPr>
+              <a:t> course or project.</a:t>
+            </a:r>
+          </a:p>
+          <a:p>
+            <a:br>
+              <a:rPr lang="en-US" b="0" dirty="0">
+                <a:solidFill>
+                  <a:srgbClr val="CCCCCC"/>
+                </a:solidFill>
+                <a:effectLst/>
+                <a:latin typeface="Consolas" panose="020B0609020204030204" pitchFamily="49" charset="0"/>
+              </a:rPr>
+            </a:br>
+            <a:r>
+              <a:rPr lang="en-US" b="0" dirty="0">
+                <a:solidFill>
+                  <a:srgbClr val="CCCCCC"/>
+                </a:solidFill>
+                <a:effectLst/>
+                <a:latin typeface="Consolas" panose="020B0609020204030204" pitchFamily="49" charset="0"/>
+              </a:rPr>
+              <a:t>Closing line: </a:t>
+            </a:r>
+            <a:r>
+              <a:rPr lang="en-US" b="0" i="1" dirty="0">
+                <a:solidFill>
+                  <a:srgbClr val="CCCCCC"/>
+                </a:solidFill>
+                <a:effectLst/>
+                <a:latin typeface="Consolas" panose="020B0609020204030204" pitchFamily="49" charset="0"/>
+              </a:rPr>
+              <a:t>*"AI is not the future. It's the now. The only question is whether you'll be ready."*</a:t>
+            </a:r>
+            <a:endParaRPr lang="en-US" b="0" dirty="0">
+              <a:solidFill>
+                <a:srgbClr val="CCCCCC"/>
+              </a:solidFill>
+              <a:effectLst/>
+              <a:latin typeface="Consolas" panose="020B0609020204030204" pitchFamily="49" charset="0"/>
+            </a:endParaRPr>
+          </a:p>
+          <a:p>
+            <a:endParaRPr lang="en-IN" dirty="0"/>
+          </a:p>
+        </p:txBody>
+      </p:sp>
+      <p:sp>
+        <p:nvSpPr>
+          <p:cNvPr id="4" name="Slide Number Placeholder 3"/>
+          <p:cNvSpPr>
+            <a:spLocks noGrp="1"/>
+          </p:cNvSpPr>
+          <p:nvPr>
+            <p:ph type="sldNum" sz="quarter" idx="5"/>
+          </p:nvPr>
+        </p:nvSpPr>
+        <p:spPr/>
+        <p:txBody>
+          <a:bodyPr/>
+          <a:lstStyle/>
+          <a:p>
+            <a:fld id="{6C7BAAA9-F324-46BB-A8DF-7D9DDBA16B5D}" type="slidenum">
+              <a:rPr lang="en-IN" smtClean="0"/>
+              <a:t>13</a:t>
+            </a:fld>
+            <a:endParaRPr lang="en-IN"/>
+          </a:p>
+        </p:txBody>
+      </p:sp>
+    </p:spTree>
+    <p:extLst>
+      <p:ext uri="{BB962C8B-B14F-4D97-AF65-F5344CB8AC3E}">
+        <p14:creationId xmlns:p14="http://schemas.microsoft.com/office/powerpoint/2010/main" val="378324351"/>
+      </p:ext>
+    </p:extLst>
+  </p:cSld>
+  <p:clrMapOvr>
+    <a:masterClrMapping/>
+  </p:clrMapOvr>
+</p:notes>
+</file>
+
+<file path=ppt/notesSlides/notesSlide2.xml><?xml version="1.0" encoding="utf-8"?>
+<p:notes xmlns:a="http://schemas.openxmlformats.org/drawingml/2006/main" xmlns:r="http://schemas.openxmlformats.org/officeDocument/2006/relationships" xmlns:p="http://schemas.openxmlformats.org/presentationml/2006/main">
+  <p:cSld>
+    <p:spTree>
+      <p:nvGrpSpPr>
+        <p:cNvPr id="1" name=""/>
+        <p:cNvGrpSpPr/>
+        <p:nvPr/>
+      </p:nvGrpSpPr>
+      <p:grpSpPr>
+        <a:xfrm>
+          <a:off x="0" y="0"/>
+          <a:ext cx="0" cy="0"/>
+          <a:chOff x="0" y="0"/>
+          <a:chExt cx="0" cy="0"/>
+        </a:xfrm>
+      </p:grpSpPr>
+      <p:sp>
+        <p:nvSpPr>
+          <p:cNvPr id="2" name="Slide Image Placeholder 1"/>
+          <p:cNvSpPr>
+            <a:spLocks noGrp="1" noRot="1" noChangeAspect="1"/>
+          </p:cNvSpPr>
+          <p:nvPr>
+            <p:ph type="sldImg"/>
+          </p:nvPr>
+        </p:nvSpPr>
+        <p:spPr/>
+      </p:sp>
+      <p:sp>
+        <p:nvSpPr>
+          <p:cNvPr id="3" name="Notes Placeholder 2"/>
+          <p:cNvSpPr>
+            <a:spLocks noGrp="1"/>
+          </p:cNvSpPr>
+          <p:nvPr>
+            <p:ph type="body" idx="1"/>
+          </p:nvPr>
+        </p:nvSpPr>
+        <p:spPr/>
+        <p:txBody>
+          <a:bodyPr/>
+          <a:lstStyle/>
+          <a:p>
+            <a:r>
+              <a:rPr lang="en-US" b="0" dirty="0">
+                <a:solidFill>
+                  <a:srgbClr val="CCCCCC"/>
+                </a:solidFill>
+                <a:effectLst/>
+                <a:latin typeface="Consolas" panose="020B0609020204030204" pitchFamily="49" charset="0"/>
+              </a:rPr>
+              <a:t>Examples to prompt: Google Maps routing, Instagram recommendations, YouTube suggestions, autocomplete on phone, Spotify playlists, spam filters.</a:t>
+            </a:r>
+          </a:p>
+          <a:p>
+            <a:br>
+              <a:rPr lang="en-US" b="0" dirty="0">
+                <a:solidFill>
+                  <a:srgbClr val="CCCCCC"/>
+                </a:solidFill>
+                <a:effectLst/>
+                <a:latin typeface="Consolas" panose="020B0609020204030204" pitchFamily="49" charset="0"/>
+              </a:rPr>
+            </a:br>
+            <a:r>
+              <a:rPr lang="en-US" b="1" dirty="0">
+                <a:solidFill>
+                  <a:srgbClr val="569CD6"/>
+                </a:solidFill>
+                <a:effectLst/>
+                <a:latin typeface="Consolas" panose="020B0609020204030204" pitchFamily="49" charset="0"/>
+              </a:rPr>
+              <a:t>**Key line:**</a:t>
+            </a:r>
+            <a:r>
+              <a:rPr lang="en-US" b="0" dirty="0">
+                <a:solidFill>
+                  <a:srgbClr val="CCCCCC"/>
+                </a:solidFill>
+                <a:effectLst/>
+                <a:latin typeface="Consolas" panose="020B0609020204030204" pitchFamily="49" charset="0"/>
+              </a:rPr>
+              <a:t> </a:t>
+            </a:r>
+            <a:r>
+              <a:rPr lang="en-US" b="0" i="1" dirty="0">
+                <a:solidFill>
+                  <a:srgbClr val="CCCCCC"/>
+                </a:solidFill>
+                <a:effectLst/>
+                <a:latin typeface="Consolas" panose="020B0609020204030204" pitchFamily="49" charset="0"/>
+              </a:rPr>
+              <a:t>*"AI is not just a tech thing. It's in every industry, every career. Today we'll show you how."*</a:t>
+            </a:r>
+            <a:endParaRPr lang="en-US" b="0" dirty="0">
+              <a:solidFill>
+                <a:srgbClr val="CCCCCC"/>
+              </a:solidFill>
+              <a:effectLst/>
+              <a:latin typeface="Consolas" panose="020B0609020204030204" pitchFamily="49" charset="0"/>
+            </a:endParaRPr>
+          </a:p>
+          <a:p>
+            <a:endParaRPr lang="en-IN" dirty="0"/>
+          </a:p>
+        </p:txBody>
+      </p:sp>
+      <p:sp>
+        <p:nvSpPr>
+          <p:cNvPr id="4" name="Slide Number Placeholder 3"/>
+          <p:cNvSpPr>
+            <a:spLocks noGrp="1"/>
+          </p:cNvSpPr>
+          <p:nvPr>
+            <p:ph type="sldNum" sz="quarter" idx="5"/>
+          </p:nvPr>
+        </p:nvSpPr>
+        <p:spPr/>
+        <p:txBody>
+          <a:bodyPr/>
+          <a:lstStyle/>
+          <a:p>
+            <a:fld id="{6C7BAAA9-F324-46BB-A8DF-7D9DDBA16B5D}" type="slidenum">
+              <a:rPr lang="en-IN" smtClean="0"/>
+              <a:t>2</a:t>
+            </a:fld>
+            <a:endParaRPr lang="en-IN"/>
+          </a:p>
+        </p:txBody>
+      </p:sp>
+    </p:spTree>
+    <p:extLst>
+      <p:ext uri="{BB962C8B-B14F-4D97-AF65-F5344CB8AC3E}">
+        <p14:creationId xmlns:p14="http://schemas.microsoft.com/office/powerpoint/2010/main" val="2243791443"/>
+      </p:ext>
+    </p:extLst>
+  </p:cSld>
+  <p:clrMapOvr>
+    <a:masterClrMapping/>
+  </p:clrMapOvr>
+</p:notes>
+</file>
+
+<file path=ppt/notesSlides/notesSlide3.xml><?xml version="1.0" encoding="utf-8"?>
+<p:notes xmlns:a="http://schemas.openxmlformats.org/drawingml/2006/main" xmlns:r="http://schemas.openxmlformats.org/officeDocument/2006/relationships" xmlns:p="http://schemas.openxmlformats.org/presentationml/2006/main">
+  <p:cSld>
+    <p:spTree>
+      <p:nvGrpSpPr>
+        <p:cNvPr id="1" name=""/>
+        <p:cNvGrpSpPr/>
+        <p:nvPr/>
+      </p:nvGrpSpPr>
+      <p:grpSpPr>
+        <a:xfrm>
+          <a:off x="0" y="0"/>
+          <a:ext cx="0" cy="0"/>
+          <a:chOff x="0" y="0"/>
+          <a:chExt cx="0" cy="0"/>
+        </a:xfrm>
+      </p:grpSpPr>
+      <p:sp>
+        <p:nvSpPr>
+          <p:cNvPr id="2" name="Slide Image Placeholder 1"/>
+          <p:cNvSpPr>
+            <a:spLocks noGrp="1" noRot="1" noChangeAspect="1"/>
+          </p:cNvSpPr>
+          <p:nvPr>
+            <p:ph type="sldImg"/>
+          </p:nvPr>
+        </p:nvSpPr>
+        <p:spPr/>
+      </p:sp>
+      <p:sp>
+        <p:nvSpPr>
+          <p:cNvPr id="3" name="Notes Placeholder 2"/>
+          <p:cNvSpPr>
+            <a:spLocks noGrp="1"/>
+          </p:cNvSpPr>
+          <p:nvPr>
+            <p:ph type="body" idx="1"/>
+          </p:nvPr>
+        </p:nvSpPr>
+        <p:spPr/>
+        <p:txBody>
+          <a:bodyPr/>
+          <a:lstStyle/>
+          <a:p>
+            <a:r>
+              <a:rPr lang="en-IN" b="0" dirty="0">
+                <a:solidFill>
+                  <a:srgbClr val="CCCCCC"/>
+                </a:solidFill>
+                <a:effectLst/>
+                <a:latin typeface="Consolas" panose="020B0609020204030204" pitchFamily="49" charset="0"/>
+              </a:rPr>
+              <a:t>Quick timeline of how fast AI has moved:</a:t>
+            </a:r>
+          </a:p>
+          <a:p>
+            <a:br>
+              <a:rPr lang="en-IN" b="0" dirty="0">
+                <a:solidFill>
+                  <a:srgbClr val="CCCCCC"/>
+                </a:solidFill>
+                <a:effectLst/>
+                <a:latin typeface="Consolas" panose="020B0609020204030204" pitchFamily="49" charset="0"/>
+              </a:rPr>
+            </a:br>
+            <a:r>
+              <a:rPr lang="en-IN" b="0" dirty="0">
+                <a:solidFill>
+                  <a:srgbClr val="CCCCCC"/>
+                </a:solidFill>
+                <a:effectLst/>
+                <a:latin typeface="Consolas" panose="020B0609020204030204" pitchFamily="49" charset="0"/>
+              </a:rPr>
+              <a:t>| Year | Milestone | Why It Matters |</a:t>
+            </a:r>
+          </a:p>
+          <a:p>
+            <a:r>
+              <a:rPr lang="en-IN" b="0" dirty="0">
+                <a:solidFill>
+                  <a:srgbClr val="CCCCCC"/>
+                </a:solidFill>
+                <a:effectLst/>
+                <a:latin typeface="Consolas" panose="020B0609020204030204" pitchFamily="49" charset="0"/>
+              </a:rPr>
+              <a:t>|------|-----------|----------------|</a:t>
+            </a:r>
+          </a:p>
+          <a:p>
+            <a:r>
+              <a:rPr lang="en-IN" b="0" dirty="0">
+                <a:solidFill>
+                  <a:srgbClr val="CCCCCC"/>
+                </a:solidFill>
+                <a:effectLst/>
+                <a:latin typeface="Consolas" panose="020B0609020204030204" pitchFamily="49" charset="0"/>
+              </a:rPr>
+              <a:t>| 2020 | GPT-3 launched | First time AI could write like a human |</a:t>
+            </a:r>
+          </a:p>
+          <a:p>
+            <a:r>
+              <a:rPr lang="en-IN" b="0" dirty="0">
+                <a:solidFill>
+                  <a:srgbClr val="CCCCCC"/>
+                </a:solidFill>
+                <a:effectLst/>
+                <a:latin typeface="Consolas" panose="020B0609020204030204" pitchFamily="49" charset="0"/>
+              </a:rPr>
+              <a:t>| 2021 | DALL-E, GitHub Copilot | AI started creating images and writing code |</a:t>
+            </a:r>
+          </a:p>
+          <a:p>
+            <a:r>
+              <a:rPr lang="en-IN" b="0" dirty="0">
+                <a:solidFill>
+                  <a:srgbClr val="CCCCCC"/>
+                </a:solidFill>
+                <a:effectLst/>
+                <a:latin typeface="Consolas" panose="020B0609020204030204" pitchFamily="49" charset="0"/>
+              </a:rPr>
+              <a:t>| 2022 | ChatGPT released | AI became mainstream overnight |</a:t>
+            </a:r>
+          </a:p>
+          <a:p>
+            <a:r>
+              <a:rPr lang="en-IN" b="0" dirty="0">
+                <a:solidFill>
+                  <a:srgbClr val="CCCCCC"/>
+                </a:solidFill>
+                <a:effectLst/>
+                <a:latin typeface="Consolas" panose="020B0609020204030204" pitchFamily="49" charset="0"/>
+              </a:rPr>
+              <a:t>| 2023 | GPT-4, Gemini, </a:t>
+            </a:r>
+            <a:r>
+              <a:rPr lang="en-IN" b="0" dirty="0" err="1">
+                <a:solidFill>
+                  <a:srgbClr val="CCCCCC"/>
+                </a:solidFill>
+                <a:effectLst/>
+                <a:latin typeface="Consolas" panose="020B0609020204030204" pitchFamily="49" charset="0"/>
+              </a:rPr>
+              <a:t>Midjourney</a:t>
+            </a:r>
+            <a:r>
+              <a:rPr lang="en-IN" b="0" dirty="0">
+                <a:solidFill>
+                  <a:srgbClr val="CCCCCC"/>
+                </a:solidFill>
+                <a:effectLst/>
+                <a:latin typeface="Consolas" panose="020B0609020204030204" pitchFamily="49" charset="0"/>
+              </a:rPr>
+              <a:t> V5 | AI got multimodal -- text, images, code, everything |</a:t>
+            </a:r>
+          </a:p>
+          <a:p>
+            <a:r>
+              <a:rPr lang="en-IN" b="0" dirty="0">
+                <a:solidFill>
+                  <a:srgbClr val="CCCCCC"/>
+                </a:solidFill>
+                <a:effectLst/>
+                <a:latin typeface="Consolas" panose="020B0609020204030204" pitchFamily="49" charset="0"/>
+              </a:rPr>
+              <a:t>| 2024 | Sora (video), AI Agents | AI started creating videos and working autonomously |</a:t>
+            </a:r>
+          </a:p>
+          <a:p>
+            <a:r>
+              <a:rPr lang="en-IN" b="0" dirty="0">
+                <a:solidFill>
+                  <a:srgbClr val="CCCCCC"/>
+                </a:solidFill>
+                <a:effectLst/>
+                <a:latin typeface="Consolas" panose="020B0609020204030204" pitchFamily="49" charset="0"/>
+              </a:rPr>
+              <a:t>| 2025-26 | AI in every workplace | Not a tool anymore -- it's infrastructure |</a:t>
+            </a:r>
+          </a:p>
+          <a:p>
+            <a:endParaRPr lang="en-IN" dirty="0"/>
+          </a:p>
+        </p:txBody>
+      </p:sp>
+      <p:sp>
+        <p:nvSpPr>
+          <p:cNvPr id="4" name="Slide Number Placeholder 3"/>
+          <p:cNvSpPr>
+            <a:spLocks noGrp="1"/>
+          </p:cNvSpPr>
+          <p:nvPr>
+            <p:ph type="sldNum" sz="quarter" idx="5"/>
+          </p:nvPr>
+        </p:nvSpPr>
+        <p:spPr/>
+        <p:txBody>
+          <a:bodyPr/>
+          <a:lstStyle/>
+          <a:p>
+            <a:fld id="{6C7BAAA9-F324-46BB-A8DF-7D9DDBA16B5D}" type="slidenum">
+              <a:rPr lang="en-IN" smtClean="0"/>
+              <a:t>3</a:t>
+            </a:fld>
+            <a:endParaRPr lang="en-IN"/>
+          </a:p>
+        </p:txBody>
+      </p:sp>
+    </p:spTree>
+    <p:extLst>
+      <p:ext uri="{BB962C8B-B14F-4D97-AF65-F5344CB8AC3E}">
+        <p14:creationId xmlns:p14="http://schemas.microsoft.com/office/powerpoint/2010/main" val="4205978959"/>
+      </p:ext>
+    </p:extLst>
+  </p:cSld>
+  <p:clrMapOvr>
+    <a:masterClrMapping/>
+  </p:clrMapOvr>
+</p:notes>
+</file>
+
+<file path=ppt/notesSlides/notesSlide4.xml><?xml version="1.0" encoding="utf-8"?>
+<p:notes xmlns:a="http://schemas.openxmlformats.org/drawingml/2006/main" xmlns:r="http://schemas.openxmlformats.org/officeDocument/2006/relationships" xmlns:p="http://schemas.openxmlformats.org/presentationml/2006/main">
+  <p:cSld>
+    <p:spTree>
+      <p:nvGrpSpPr>
+        <p:cNvPr id="1" name=""/>
+        <p:cNvGrpSpPr/>
+        <p:nvPr/>
+      </p:nvGrpSpPr>
+      <p:grpSpPr>
+        <a:xfrm>
+          <a:off x="0" y="0"/>
+          <a:ext cx="0" cy="0"/>
+          <a:chOff x="0" y="0"/>
+          <a:chExt cx="0" cy="0"/>
+        </a:xfrm>
+      </p:grpSpPr>
+      <p:sp>
+        <p:nvSpPr>
+          <p:cNvPr id="2" name="Slide Image Placeholder 1"/>
+          <p:cNvSpPr>
+            <a:spLocks noGrp="1" noRot="1" noChangeAspect="1"/>
+          </p:cNvSpPr>
+          <p:nvPr>
+            <p:ph type="sldImg"/>
+          </p:nvPr>
+        </p:nvSpPr>
+        <p:spPr/>
+      </p:sp>
+      <p:sp>
+        <p:nvSpPr>
+          <p:cNvPr id="3" name="Notes Placeholder 2"/>
+          <p:cNvSpPr>
+            <a:spLocks noGrp="1"/>
+          </p:cNvSpPr>
+          <p:nvPr>
+            <p:ph type="body" idx="1"/>
+          </p:nvPr>
+        </p:nvSpPr>
+        <p:spPr/>
+        <p:txBody>
+          <a:bodyPr/>
+          <a:lstStyle/>
+          <a:p>
+            <a:r>
+              <a:rPr lang="en-US" b="0" dirty="0">
+                <a:solidFill>
+                  <a:srgbClr val="6796E6"/>
+                </a:solidFill>
+                <a:effectLst/>
+                <a:latin typeface="Consolas" panose="020B0609020204030204" pitchFamily="49" charset="0"/>
+              </a:rPr>
+              <a:t>-</a:t>
+            </a:r>
+            <a:r>
+              <a:rPr lang="en-US" b="0" dirty="0">
+                <a:solidFill>
+                  <a:srgbClr val="CCCCCC"/>
+                </a:solidFill>
+                <a:effectLst/>
+                <a:latin typeface="Consolas" panose="020B0609020204030204" pitchFamily="49" charset="0"/>
+              </a:rPr>
+              <a:t> 80% of companies will use AI by 2026</a:t>
+            </a:r>
+          </a:p>
+          <a:p>
+            <a:r>
+              <a:rPr lang="en-US" b="0" dirty="0">
+                <a:solidFill>
+                  <a:srgbClr val="6796E6"/>
+                </a:solidFill>
+                <a:effectLst/>
+                <a:latin typeface="Consolas" panose="020B0609020204030204" pitchFamily="49" charset="0"/>
+              </a:rPr>
+              <a:t>-</a:t>
+            </a:r>
+            <a:r>
+              <a:rPr lang="en-US" b="0" dirty="0">
+                <a:solidFill>
+                  <a:srgbClr val="CCCCCC"/>
+                </a:solidFill>
+                <a:effectLst/>
+                <a:latin typeface="Consolas" panose="020B0609020204030204" pitchFamily="49" charset="0"/>
+              </a:rPr>
+              <a:t> 97 million new AI-related jobs globally (World Economic Forum)</a:t>
+            </a:r>
+          </a:p>
+          <a:p>
+            <a:r>
+              <a:rPr lang="en-US" b="0" dirty="0">
+                <a:solidFill>
+                  <a:srgbClr val="6796E6"/>
+                </a:solidFill>
+                <a:effectLst/>
+                <a:latin typeface="Consolas" panose="020B0609020204030204" pitchFamily="49" charset="0"/>
+              </a:rPr>
+              <a:t>-</a:t>
+            </a:r>
+            <a:r>
+              <a:rPr lang="en-US" b="0" dirty="0">
+                <a:solidFill>
+                  <a:srgbClr val="CCCCCC"/>
+                </a:solidFill>
+                <a:effectLst/>
+                <a:latin typeface="Consolas" panose="020B0609020204030204" pitchFamily="49" charset="0"/>
+              </a:rPr>
+              <a:t> India's AI market projected to hit $17 billion by 2027</a:t>
+            </a:r>
+          </a:p>
+          <a:p>
+            <a:br>
+              <a:rPr lang="en-US" b="0" dirty="0">
+                <a:solidFill>
+                  <a:srgbClr val="CCCCCC"/>
+                </a:solidFill>
+                <a:effectLst/>
+                <a:latin typeface="Consolas" panose="020B0609020204030204" pitchFamily="49" charset="0"/>
+              </a:rPr>
+            </a:br>
+            <a:r>
+              <a:rPr lang="en-US" b="0" i="1" dirty="0">
+                <a:solidFill>
+                  <a:srgbClr val="CCCCCC"/>
+                </a:solidFill>
+                <a:effectLst/>
+                <a:latin typeface="Consolas" panose="020B0609020204030204" pitchFamily="49" charset="0"/>
+              </a:rPr>
+              <a:t>*"This is not hype. This is infrastructure. Like the internet was in 2005. The question is: will you be ready?"*</a:t>
+            </a:r>
+            <a:endParaRPr lang="en-US" b="0" dirty="0">
+              <a:solidFill>
+                <a:srgbClr val="CCCCCC"/>
+              </a:solidFill>
+              <a:effectLst/>
+              <a:latin typeface="Consolas" panose="020B0609020204030204" pitchFamily="49" charset="0"/>
+            </a:endParaRPr>
+          </a:p>
+          <a:p>
+            <a:endParaRPr lang="en-IN" dirty="0"/>
+          </a:p>
+        </p:txBody>
+      </p:sp>
+      <p:sp>
+        <p:nvSpPr>
+          <p:cNvPr id="4" name="Slide Number Placeholder 3"/>
+          <p:cNvSpPr>
+            <a:spLocks noGrp="1"/>
+          </p:cNvSpPr>
+          <p:nvPr>
+            <p:ph type="sldNum" sz="quarter" idx="5"/>
+          </p:nvPr>
+        </p:nvSpPr>
+        <p:spPr/>
+        <p:txBody>
+          <a:bodyPr/>
+          <a:lstStyle/>
+          <a:p>
+            <a:fld id="{6C7BAAA9-F324-46BB-A8DF-7D9DDBA16B5D}" type="slidenum">
+              <a:rPr lang="en-IN" smtClean="0"/>
+              <a:t>4</a:t>
+            </a:fld>
+            <a:endParaRPr lang="en-IN"/>
+          </a:p>
+        </p:txBody>
+      </p:sp>
+    </p:spTree>
+    <p:extLst>
+      <p:ext uri="{BB962C8B-B14F-4D97-AF65-F5344CB8AC3E}">
+        <p14:creationId xmlns:p14="http://schemas.microsoft.com/office/powerpoint/2010/main" val="2394562380"/>
+      </p:ext>
+    </p:extLst>
+  </p:cSld>
+  <p:clrMapOvr>
+    <a:masterClrMapping/>
+  </p:clrMapOvr>
+</p:notes>
+</file>
+
+<file path=ppt/notesSlides/notesSlide5.xml><?xml version="1.0" encoding="utf-8"?>
+<p:notes xmlns:a="http://schemas.openxmlformats.org/drawingml/2006/main" xmlns:r="http://schemas.openxmlformats.org/officeDocument/2006/relationships" xmlns:p="http://schemas.openxmlformats.org/presentationml/2006/main">
+  <p:cSld>
+    <p:spTree>
+      <p:nvGrpSpPr>
+        <p:cNvPr id="1" name=""/>
+        <p:cNvGrpSpPr/>
+        <p:nvPr/>
+      </p:nvGrpSpPr>
+      <p:grpSpPr>
+        <a:xfrm>
+          <a:off x="0" y="0"/>
+          <a:ext cx="0" cy="0"/>
+          <a:chOff x="0" y="0"/>
+          <a:chExt cx="0" cy="0"/>
+        </a:xfrm>
+      </p:grpSpPr>
+      <p:sp>
+        <p:nvSpPr>
+          <p:cNvPr id="2" name="Slide Image Placeholder 1"/>
+          <p:cNvSpPr>
+            <a:spLocks noGrp="1" noRot="1" noChangeAspect="1"/>
+          </p:cNvSpPr>
+          <p:nvPr>
+            <p:ph type="sldImg"/>
+          </p:nvPr>
+        </p:nvSpPr>
+        <p:spPr/>
+      </p:sp>
+      <p:sp>
+        <p:nvSpPr>
+          <p:cNvPr id="3" name="Notes Placeholder 2"/>
+          <p:cNvSpPr>
+            <a:spLocks noGrp="1"/>
+          </p:cNvSpPr>
+          <p:nvPr>
+            <p:ph type="body" idx="1"/>
+          </p:nvPr>
+        </p:nvSpPr>
+        <p:spPr/>
+        <p:txBody>
+          <a:bodyPr/>
+          <a:lstStyle/>
+          <a:p>
+            <a:r>
+              <a:rPr lang="en-US" b="1" dirty="0">
+                <a:solidFill>
+                  <a:srgbClr val="569CD6"/>
+                </a:solidFill>
+                <a:effectLst/>
+                <a:latin typeface="Consolas" panose="020B0609020204030204" pitchFamily="49" charset="0"/>
+              </a:rPr>
+              <a:t>#### Field 1: Coding &amp; App Development (→ Python Track)</a:t>
+            </a:r>
+            <a:endParaRPr lang="en-US" b="0" dirty="0">
+              <a:solidFill>
+                <a:srgbClr val="CCCCCC"/>
+              </a:solidFill>
+              <a:effectLst/>
+              <a:latin typeface="Consolas" panose="020B0609020204030204" pitchFamily="49" charset="0"/>
+            </a:endParaRPr>
+          </a:p>
+          <a:p>
+            <a:br>
+              <a:rPr lang="en-US" b="0" dirty="0">
+                <a:solidFill>
+                  <a:srgbClr val="CCCCCC"/>
+                </a:solidFill>
+                <a:effectLst/>
+                <a:latin typeface="Consolas" panose="020B0609020204030204" pitchFamily="49" charset="0"/>
+              </a:rPr>
+            </a:br>
+            <a:r>
+              <a:rPr lang="en-US" b="0" dirty="0">
+                <a:solidFill>
+                  <a:srgbClr val="6796E6"/>
+                </a:solidFill>
+                <a:effectLst/>
+                <a:latin typeface="Consolas" panose="020B0609020204030204" pitchFamily="49" charset="0"/>
+              </a:rPr>
+              <a:t>-</a:t>
+            </a:r>
+            <a:r>
+              <a:rPr lang="en-US" b="0" dirty="0">
+                <a:solidFill>
+                  <a:srgbClr val="CCCCCC"/>
+                </a:solidFill>
+                <a:effectLst/>
+                <a:latin typeface="Consolas" panose="020B0609020204030204" pitchFamily="49" charset="0"/>
+              </a:rPr>
+              <a:t> </a:t>
+            </a:r>
+            <a:r>
+              <a:rPr lang="en-US" b="1" dirty="0">
+                <a:solidFill>
+                  <a:srgbClr val="569CD6"/>
+                </a:solidFill>
+                <a:effectLst/>
+                <a:latin typeface="Consolas" panose="020B0609020204030204" pitchFamily="49" charset="0"/>
+              </a:rPr>
+              <a:t>**GitHub Copilot:**</a:t>
+            </a:r>
+            <a:r>
+              <a:rPr lang="en-US" b="0" dirty="0">
+                <a:solidFill>
+                  <a:srgbClr val="CCCCCC"/>
+                </a:solidFill>
+                <a:effectLst/>
+                <a:latin typeface="Consolas" panose="020B0609020204030204" pitchFamily="49" charset="0"/>
+              </a:rPr>
+              <a:t> AI that writes code alongside you</a:t>
+            </a:r>
+          </a:p>
+          <a:p>
+            <a:r>
+              <a:rPr lang="en-US" b="0" dirty="0">
+                <a:solidFill>
+                  <a:srgbClr val="6796E6"/>
+                </a:solidFill>
+                <a:effectLst/>
+                <a:latin typeface="Consolas" panose="020B0609020204030204" pitchFamily="49" charset="0"/>
+              </a:rPr>
+              <a:t>-</a:t>
+            </a:r>
+            <a:r>
+              <a:rPr lang="en-US" b="0" dirty="0">
+                <a:solidFill>
+                  <a:srgbClr val="CCCCCC"/>
+                </a:solidFill>
+                <a:effectLst/>
+                <a:latin typeface="Consolas" panose="020B0609020204030204" pitchFamily="49" charset="0"/>
+              </a:rPr>
+              <a:t> </a:t>
+            </a:r>
+            <a:r>
+              <a:rPr lang="en-US" b="1" dirty="0">
+                <a:solidFill>
+                  <a:srgbClr val="569CD6"/>
+                </a:solidFill>
+                <a:effectLst/>
+                <a:latin typeface="Consolas" panose="020B0609020204030204" pitchFamily="49" charset="0"/>
+              </a:rPr>
+              <a:t>**Cursor, Windsurf:**</a:t>
+            </a:r>
+            <a:r>
+              <a:rPr lang="en-US" b="0" dirty="0">
+                <a:solidFill>
+                  <a:srgbClr val="CCCCCC"/>
+                </a:solidFill>
+                <a:effectLst/>
+                <a:latin typeface="Consolas" panose="020B0609020204030204" pitchFamily="49" charset="0"/>
+              </a:rPr>
+              <a:t> AI-powered code editors</a:t>
+            </a:r>
+          </a:p>
+          <a:p>
+            <a:r>
+              <a:rPr lang="en-US" b="0" dirty="0">
+                <a:solidFill>
+                  <a:srgbClr val="6796E6"/>
+                </a:solidFill>
+                <a:effectLst/>
+                <a:latin typeface="Consolas" panose="020B0609020204030204" pitchFamily="49" charset="0"/>
+              </a:rPr>
+              <a:t>-</a:t>
+            </a:r>
+            <a:r>
+              <a:rPr lang="en-US" b="0" dirty="0">
+                <a:solidFill>
+                  <a:srgbClr val="CCCCCC"/>
+                </a:solidFill>
+                <a:effectLst/>
+                <a:latin typeface="Consolas" panose="020B0609020204030204" pitchFamily="49" charset="0"/>
+              </a:rPr>
+              <a:t> </a:t>
+            </a:r>
+            <a:r>
+              <a:rPr lang="en-US" b="1" dirty="0">
+                <a:solidFill>
+                  <a:srgbClr val="569CD6"/>
+                </a:solidFill>
+                <a:effectLst/>
+                <a:latin typeface="Consolas" panose="020B0609020204030204" pitchFamily="49" charset="0"/>
+              </a:rPr>
+              <a:t>**AI Code Review:**</a:t>
+            </a:r>
+            <a:r>
+              <a:rPr lang="en-US" b="0" dirty="0">
+                <a:solidFill>
+                  <a:srgbClr val="CCCCCC"/>
+                </a:solidFill>
+                <a:effectLst/>
+                <a:latin typeface="Consolas" panose="020B0609020204030204" pitchFamily="49" charset="0"/>
+              </a:rPr>
+              <a:t> Catches bugs before they ship</a:t>
+            </a:r>
+          </a:p>
+          <a:p>
+            <a:r>
+              <a:rPr lang="en-US" b="0" dirty="0">
+                <a:solidFill>
+                  <a:srgbClr val="6796E6"/>
+                </a:solidFill>
+                <a:effectLst/>
+                <a:latin typeface="Consolas" panose="020B0609020204030204" pitchFamily="49" charset="0"/>
+              </a:rPr>
+              <a:t>-</a:t>
+            </a:r>
+            <a:r>
+              <a:rPr lang="en-US" b="0" dirty="0">
+                <a:solidFill>
+                  <a:srgbClr val="CCCCCC"/>
+                </a:solidFill>
+                <a:effectLst/>
+                <a:latin typeface="Consolas" panose="020B0609020204030204" pitchFamily="49" charset="0"/>
+              </a:rPr>
+              <a:t> </a:t>
+            </a:r>
+            <a:r>
+              <a:rPr lang="en-US" b="1" dirty="0">
+                <a:solidFill>
+                  <a:srgbClr val="569CD6"/>
+                </a:solidFill>
+                <a:effectLst/>
+                <a:latin typeface="Consolas" panose="020B0609020204030204" pitchFamily="49" charset="0"/>
+              </a:rPr>
+              <a:t>**Automated Testing:**</a:t>
+            </a:r>
+            <a:r>
+              <a:rPr lang="en-US" b="0" dirty="0">
+                <a:solidFill>
+                  <a:srgbClr val="CCCCCC"/>
+                </a:solidFill>
+                <a:effectLst/>
+                <a:latin typeface="Consolas" panose="020B0609020204030204" pitchFamily="49" charset="0"/>
+              </a:rPr>
+              <a:t> AI writes test cases</a:t>
+            </a:r>
+          </a:p>
+          <a:p>
+            <a:br>
+              <a:rPr lang="en-US" b="0" dirty="0">
+                <a:solidFill>
+                  <a:srgbClr val="CCCCCC"/>
+                </a:solidFill>
+                <a:effectLst/>
+                <a:latin typeface="Consolas" panose="020B0609020204030204" pitchFamily="49" charset="0"/>
+              </a:rPr>
+            </a:br>
+            <a:r>
+              <a:rPr lang="en-US" b="1" dirty="0">
+                <a:solidFill>
+                  <a:srgbClr val="569CD6"/>
+                </a:solidFill>
+                <a:effectLst/>
+                <a:latin typeface="Consolas" panose="020B0609020204030204" pitchFamily="49" charset="0"/>
+              </a:rPr>
+              <a:t>**The reality:**</a:t>
+            </a:r>
+            <a:r>
+              <a:rPr lang="en-US" b="0" dirty="0">
+                <a:solidFill>
+                  <a:srgbClr val="CCCCCC"/>
+                </a:solidFill>
+                <a:effectLst/>
+                <a:latin typeface="Consolas" panose="020B0609020204030204" pitchFamily="49" charset="0"/>
+              </a:rPr>
+              <a:t> AI writes code. But someone has to tell it </a:t>
+            </a:r>
+            <a:r>
+              <a:rPr lang="en-US" b="0" i="1" dirty="0">
+                <a:solidFill>
+                  <a:srgbClr val="CCCCCC"/>
+                </a:solidFill>
+                <a:effectLst/>
+                <a:latin typeface="Consolas" panose="020B0609020204030204" pitchFamily="49" charset="0"/>
+              </a:rPr>
+              <a:t>*what*</a:t>
+            </a:r>
+            <a:r>
+              <a:rPr lang="en-US" b="0" dirty="0">
+                <a:solidFill>
+                  <a:srgbClr val="CCCCCC"/>
+                </a:solidFill>
+                <a:effectLst/>
+                <a:latin typeface="Consolas" panose="020B0609020204030204" pitchFamily="49" charset="0"/>
+              </a:rPr>
+              <a:t> to build, review if it's correct, and architect the system. That's the builder.</a:t>
+            </a:r>
+          </a:p>
+          <a:p>
+            <a:br>
+              <a:rPr lang="en-US" b="0" dirty="0">
+                <a:solidFill>
+                  <a:srgbClr val="CCCCCC"/>
+                </a:solidFill>
+                <a:effectLst/>
+                <a:latin typeface="Consolas" panose="020B0609020204030204" pitchFamily="49" charset="0"/>
+              </a:rPr>
+            </a:br>
+            <a:r>
+              <a:rPr lang="en-US" b="0" i="1" dirty="0">
+                <a:solidFill>
+                  <a:srgbClr val="CCCCCC"/>
+                </a:solidFill>
+                <a:effectLst/>
+                <a:latin typeface="Consolas" panose="020B0609020204030204" pitchFamily="49" charset="0"/>
+              </a:rPr>
+              <a:t>*"Every tech company is hiring people who can work WITH AI, not be replaced by it. That's what the Python track teaches you."*</a:t>
+            </a:r>
+            <a:endParaRPr lang="en-US" b="0" dirty="0">
+              <a:solidFill>
+                <a:srgbClr val="CCCCCC"/>
+              </a:solidFill>
+              <a:effectLst/>
+              <a:latin typeface="Consolas" panose="020B0609020204030204" pitchFamily="49" charset="0"/>
+            </a:endParaRPr>
+          </a:p>
+          <a:p>
+            <a:endParaRPr lang="en-IN" dirty="0"/>
+          </a:p>
+        </p:txBody>
+      </p:sp>
+      <p:sp>
+        <p:nvSpPr>
+          <p:cNvPr id="4" name="Slide Number Placeholder 3"/>
+          <p:cNvSpPr>
+            <a:spLocks noGrp="1"/>
+          </p:cNvSpPr>
+          <p:nvPr>
+            <p:ph type="sldNum" sz="quarter" idx="5"/>
+          </p:nvPr>
+        </p:nvSpPr>
+        <p:spPr/>
+        <p:txBody>
+          <a:bodyPr/>
+          <a:lstStyle/>
+          <a:p>
+            <a:fld id="{6C7BAAA9-F324-46BB-A8DF-7D9DDBA16B5D}" type="slidenum">
+              <a:rPr lang="en-IN" smtClean="0"/>
+              <a:t>5</a:t>
+            </a:fld>
+            <a:endParaRPr lang="en-IN"/>
+          </a:p>
+        </p:txBody>
+      </p:sp>
+    </p:spTree>
+    <p:extLst>
+      <p:ext uri="{BB962C8B-B14F-4D97-AF65-F5344CB8AC3E}">
+        <p14:creationId xmlns:p14="http://schemas.microsoft.com/office/powerpoint/2010/main" val="3509629479"/>
+      </p:ext>
+    </p:extLst>
+  </p:cSld>
+  <p:clrMapOvr>
+    <a:masterClrMapping/>
+  </p:clrMapOvr>
+</p:notes>
+</file>
+
+<file path=ppt/notesSlides/notesSlide6.xml><?xml version="1.0" encoding="utf-8"?>
+<p:notes xmlns:a="http://schemas.openxmlformats.org/drawingml/2006/main" xmlns:r="http://schemas.openxmlformats.org/officeDocument/2006/relationships" xmlns:p="http://schemas.openxmlformats.org/presentationml/2006/main">
+  <p:cSld>
+    <p:spTree>
+      <p:nvGrpSpPr>
+        <p:cNvPr id="1" name=""/>
+        <p:cNvGrpSpPr/>
+        <p:nvPr/>
+      </p:nvGrpSpPr>
+      <p:grpSpPr>
+        <a:xfrm>
+          <a:off x="0" y="0"/>
+          <a:ext cx="0" cy="0"/>
+          <a:chOff x="0" y="0"/>
+          <a:chExt cx="0" cy="0"/>
+        </a:xfrm>
+      </p:grpSpPr>
+      <p:sp>
+        <p:nvSpPr>
+          <p:cNvPr id="2" name="Slide Image Placeholder 1"/>
+          <p:cNvSpPr>
+            <a:spLocks noGrp="1" noRot="1" noChangeAspect="1"/>
+          </p:cNvSpPr>
+          <p:nvPr>
+            <p:ph type="sldImg"/>
+          </p:nvPr>
+        </p:nvSpPr>
+        <p:spPr/>
+      </p:sp>
+      <p:sp>
+        <p:nvSpPr>
+          <p:cNvPr id="3" name="Notes Placeholder 2"/>
+          <p:cNvSpPr>
+            <a:spLocks noGrp="1"/>
+          </p:cNvSpPr>
+          <p:nvPr>
+            <p:ph type="body" idx="1"/>
+          </p:nvPr>
+        </p:nvSpPr>
+        <p:spPr/>
+        <p:txBody>
+          <a:bodyPr/>
+          <a:lstStyle/>
+          <a:p>
+            <a:r>
+              <a:rPr lang="en-US" b="0" dirty="0">
+                <a:solidFill>
+                  <a:srgbClr val="6796E6"/>
+                </a:solidFill>
+                <a:effectLst/>
+                <a:latin typeface="Consolas" panose="020B0609020204030204" pitchFamily="49" charset="0"/>
+              </a:rPr>
+              <a:t>-</a:t>
+            </a:r>
+            <a:r>
+              <a:rPr lang="en-US" b="0" dirty="0">
+                <a:solidFill>
+                  <a:srgbClr val="CCCCCC"/>
+                </a:solidFill>
+                <a:effectLst/>
+                <a:latin typeface="Consolas" panose="020B0609020204030204" pitchFamily="49" charset="0"/>
+              </a:rPr>
+              <a:t> </a:t>
+            </a:r>
+            <a:r>
+              <a:rPr lang="en-US" b="1" dirty="0">
+                <a:solidFill>
+                  <a:srgbClr val="569CD6"/>
+                </a:solidFill>
+                <a:effectLst/>
+                <a:latin typeface="Consolas" panose="020B0609020204030204" pitchFamily="49" charset="0"/>
+              </a:rPr>
+              <a:t>**ChatGPT for Copywriting:**</a:t>
+            </a:r>
+            <a:r>
+              <a:rPr lang="en-US" b="0" dirty="0">
+                <a:solidFill>
+                  <a:srgbClr val="CCCCCC"/>
+                </a:solidFill>
+                <a:effectLst/>
+                <a:latin typeface="Consolas" panose="020B0609020204030204" pitchFamily="49" charset="0"/>
+              </a:rPr>
+              <a:t> Ad copy, blog posts, email campaigns in seconds</a:t>
+            </a:r>
+          </a:p>
+          <a:p>
+            <a:r>
+              <a:rPr lang="en-US" b="0" dirty="0">
+                <a:solidFill>
+                  <a:srgbClr val="6796E6"/>
+                </a:solidFill>
+                <a:effectLst/>
+                <a:latin typeface="Consolas" panose="020B0609020204030204" pitchFamily="49" charset="0"/>
+              </a:rPr>
+              <a:t>-</a:t>
+            </a:r>
+            <a:r>
+              <a:rPr lang="en-US" b="0" dirty="0">
+                <a:solidFill>
+                  <a:srgbClr val="CCCCCC"/>
+                </a:solidFill>
+                <a:effectLst/>
+                <a:latin typeface="Consolas" panose="020B0609020204030204" pitchFamily="49" charset="0"/>
+              </a:rPr>
+              <a:t> </a:t>
+            </a:r>
+            <a:r>
+              <a:rPr lang="en-US" b="1" dirty="0">
+                <a:solidFill>
+                  <a:srgbClr val="569CD6"/>
+                </a:solidFill>
+                <a:effectLst/>
+                <a:latin typeface="Consolas" panose="020B0609020204030204" pitchFamily="49" charset="0"/>
+              </a:rPr>
+              <a:t>**AI Ad Targeting:**</a:t>
+            </a:r>
+            <a:r>
+              <a:rPr lang="en-US" b="0" dirty="0">
+                <a:solidFill>
+                  <a:srgbClr val="CCCCCC"/>
+                </a:solidFill>
+                <a:effectLst/>
+                <a:latin typeface="Consolas" panose="020B0609020204030204" pitchFamily="49" charset="0"/>
+              </a:rPr>
+              <a:t> Facebook, Google Ads use AI to find your customers</a:t>
+            </a:r>
+          </a:p>
+          <a:p>
+            <a:r>
+              <a:rPr lang="en-US" b="0" dirty="0">
+                <a:solidFill>
+                  <a:srgbClr val="6796E6"/>
+                </a:solidFill>
+                <a:effectLst/>
+                <a:latin typeface="Consolas" panose="020B0609020204030204" pitchFamily="49" charset="0"/>
+              </a:rPr>
+              <a:t>-</a:t>
+            </a:r>
+            <a:r>
+              <a:rPr lang="en-US" b="0" dirty="0">
+                <a:solidFill>
+                  <a:srgbClr val="CCCCCC"/>
+                </a:solidFill>
+                <a:effectLst/>
+                <a:latin typeface="Consolas" panose="020B0609020204030204" pitchFamily="49" charset="0"/>
+              </a:rPr>
+              <a:t> </a:t>
+            </a:r>
+            <a:r>
+              <a:rPr lang="en-US" b="1" dirty="0">
+                <a:solidFill>
+                  <a:srgbClr val="569CD6"/>
+                </a:solidFill>
+                <a:effectLst/>
+                <a:latin typeface="Consolas" panose="020B0609020204030204" pitchFamily="49" charset="0"/>
+              </a:rPr>
+              <a:t>**SEO Tools (Surfer, Jasper):**</a:t>
+            </a:r>
+            <a:r>
+              <a:rPr lang="en-US" b="0" dirty="0">
+                <a:solidFill>
+                  <a:srgbClr val="CCCCCC"/>
+                </a:solidFill>
+                <a:effectLst/>
+                <a:latin typeface="Consolas" panose="020B0609020204030204" pitchFamily="49" charset="0"/>
+              </a:rPr>
+              <a:t> AI optimizes your content for Google rankings</a:t>
+            </a:r>
+          </a:p>
+          <a:p>
+            <a:r>
+              <a:rPr lang="en-US" b="0" dirty="0">
+                <a:solidFill>
+                  <a:srgbClr val="6796E6"/>
+                </a:solidFill>
+                <a:effectLst/>
+                <a:latin typeface="Consolas" panose="020B0609020204030204" pitchFamily="49" charset="0"/>
+              </a:rPr>
+              <a:t>-</a:t>
+            </a:r>
+            <a:r>
+              <a:rPr lang="en-US" b="0" dirty="0">
+                <a:solidFill>
+                  <a:srgbClr val="CCCCCC"/>
+                </a:solidFill>
+                <a:effectLst/>
+                <a:latin typeface="Consolas" panose="020B0609020204030204" pitchFamily="49" charset="0"/>
+              </a:rPr>
+              <a:t> </a:t>
+            </a:r>
+            <a:r>
+              <a:rPr lang="en-US" b="1" dirty="0">
+                <a:solidFill>
+                  <a:srgbClr val="569CD6"/>
+                </a:solidFill>
+                <a:effectLst/>
+                <a:latin typeface="Consolas" panose="020B0609020204030204" pitchFamily="49" charset="0"/>
+              </a:rPr>
+              <a:t>**AI Chatbots:**</a:t>
+            </a:r>
+            <a:r>
+              <a:rPr lang="en-US" b="0" dirty="0">
+                <a:solidFill>
+                  <a:srgbClr val="CCCCCC"/>
+                </a:solidFill>
+                <a:effectLst/>
+                <a:latin typeface="Consolas" panose="020B0609020204030204" pitchFamily="49" charset="0"/>
+              </a:rPr>
+              <a:t> 24/7 customer support without hiring anyone</a:t>
+            </a:r>
+          </a:p>
+          <a:p>
+            <a:r>
+              <a:rPr lang="en-US" b="0" dirty="0">
+                <a:solidFill>
+                  <a:srgbClr val="6796E6"/>
+                </a:solidFill>
+                <a:effectLst/>
+                <a:latin typeface="Consolas" panose="020B0609020204030204" pitchFamily="49" charset="0"/>
+              </a:rPr>
+              <a:t>-</a:t>
+            </a:r>
+            <a:r>
+              <a:rPr lang="en-US" b="0" dirty="0">
+                <a:solidFill>
+                  <a:srgbClr val="CCCCCC"/>
+                </a:solidFill>
+                <a:effectLst/>
+                <a:latin typeface="Consolas" panose="020B0609020204030204" pitchFamily="49" charset="0"/>
+              </a:rPr>
+              <a:t> </a:t>
+            </a:r>
+            <a:r>
+              <a:rPr lang="en-US" b="1" dirty="0">
+                <a:solidFill>
+                  <a:srgbClr val="569CD6"/>
+                </a:solidFill>
+                <a:effectLst/>
+                <a:latin typeface="Consolas" panose="020B0609020204030204" pitchFamily="49" charset="0"/>
+              </a:rPr>
+              <a:t>**Social Media Analytics:**</a:t>
+            </a:r>
+            <a:r>
+              <a:rPr lang="en-US" b="0" dirty="0">
+                <a:solidFill>
+                  <a:srgbClr val="CCCCCC"/>
+                </a:solidFill>
+                <a:effectLst/>
+                <a:latin typeface="Consolas" panose="020B0609020204030204" pitchFamily="49" charset="0"/>
+              </a:rPr>
+              <a:t> AI predicts what content will go viral</a:t>
+            </a:r>
+          </a:p>
+          <a:p>
+            <a:br>
+              <a:rPr lang="en-US" b="0" dirty="0">
+                <a:solidFill>
+                  <a:srgbClr val="CCCCCC"/>
+                </a:solidFill>
+                <a:effectLst/>
+                <a:latin typeface="Consolas" panose="020B0609020204030204" pitchFamily="49" charset="0"/>
+              </a:rPr>
+            </a:br>
+            <a:r>
+              <a:rPr lang="en-US" b="1" dirty="0">
+                <a:solidFill>
+                  <a:srgbClr val="569CD6"/>
+                </a:solidFill>
+                <a:effectLst/>
+                <a:latin typeface="Consolas" panose="020B0609020204030204" pitchFamily="49" charset="0"/>
+              </a:rPr>
+              <a:t>**The reality:**</a:t>
+            </a:r>
+            <a:r>
+              <a:rPr lang="en-US" b="0" dirty="0">
+                <a:solidFill>
+                  <a:srgbClr val="CCCCCC"/>
+                </a:solidFill>
+                <a:effectLst/>
+                <a:latin typeface="Consolas" panose="020B0609020204030204" pitchFamily="49" charset="0"/>
+              </a:rPr>
+              <a:t> Every marketing role now requires AI skills. The marketer who uses AI does the work of 10. The one who doesn't gets left behind.</a:t>
+            </a:r>
+          </a:p>
+          <a:p>
+            <a:br>
+              <a:rPr lang="en-US" b="0" dirty="0">
+                <a:solidFill>
+                  <a:srgbClr val="CCCCCC"/>
+                </a:solidFill>
+                <a:effectLst/>
+                <a:latin typeface="Consolas" panose="020B0609020204030204" pitchFamily="49" charset="0"/>
+              </a:rPr>
+            </a:br>
+            <a:r>
+              <a:rPr lang="en-US" b="0" i="1" dirty="0">
+                <a:solidFill>
+                  <a:srgbClr val="CCCCCC"/>
+                </a:solidFill>
+                <a:effectLst/>
+                <a:latin typeface="Consolas" panose="020B0609020204030204" pitchFamily="49" charset="0"/>
+              </a:rPr>
+              <a:t>*"Digital marketing without AI is like driving without GPS. You can do it, but why would you?"*</a:t>
+            </a:r>
+            <a:endParaRPr lang="en-US" b="0" dirty="0">
+              <a:solidFill>
+                <a:srgbClr val="CCCCCC"/>
+              </a:solidFill>
+              <a:effectLst/>
+              <a:latin typeface="Consolas" panose="020B0609020204030204" pitchFamily="49" charset="0"/>
+            </a:endParaRPr>
+          </a:p>
+          <a:p>
+            <a:endParaRPr lang="en-IN" dirty="0"/>
+          </a:p>
+        </p:txBody>
+      </p:sp>
+      <p:sp>
+        <p:nvSpPr>
+          <p:cNvPr id="4" name="Slide Number Placeholder 3"/>
+          <p:cNvSpPr>
+            <a:spLocks noGrp="1"/>
+          </p:cNvSpPr>
+          <p:nvPr>
+            <p:ph type="sldNum" sz="quarter" idx="5"/>
+          </p:nvPr>
+        </p:nvSpPr>
+        <p:spPr/>
+        <p:txBody>
+          <a:bodyPr/>
+          <a:lstStyle/>
+          <a:p>
+            <a:fld id="{6C7BAAA9-F324-46BB-A8DF-7D9DDBA16B5D}" type="slidenum">
+              <a:rPr lang="en-IN" smtClean="0"/>
+              <a:t>6</a:t>
+            </a:fld>
+            <a:endParaRPr lang="en-IN"/>
+          </a:p>
+        </p:txBody>
+      </p:sp>
+    </p:spTree>
+    <p:extLst>
+      <p:ext uri="{BB962C8B-B14F-4D97-AF65-F5344CB8AC3E}">
+        <p14:creationId xmlns:p14="http://schemas.microsoft.com/office/powerpoint/2010/main" val="1441354142"/>
+      </p:ext>
+    </p:extLst>
+  </p:cSld>
+  <p:clrMapOvr>
+    <a:masterClrMapping/>
+  </p:clrMapOvr>
+</p:notes>
+</file>
+
+<file path=ppt/notesSlides/notesSlide7.xml><?xml version="1.0" encoding="utf-8"?>
+<p:notes xmlns:a="http://schemas.openxmlformats.org/drawingml/2006/main" xmlns:r="http://schemas.openxmlformats.org/officeDocument/2006/relationships" xmlns:p="http://schemas.openxmlformats.org/presentationml/2006/main">
+  <p:cSld>
+    <p:spTree>
+      <p:nvGrpSpPr>
+        <p:cNvPr id="1" name=""/>
+        <p:cNvGrpSpPr/>
+        <p:nvPr/>
+      </p:nvGrpSpPr>
+      <p:grpSpPr>
+        <a:xfrm>
+          <a:off x="0" y="0"/>
+          <a:ext cx="0" cy="0"/>
+          <a:chOff x="0" y="0"/>
+          <a:chExt cx="0" cy="0"/>
+        </a:xfrm>
+      </p:grpSpPr>
+      <p:sp>
+        <p:nvSpPr>
+          <p:cNvPr id="2" name="Slide Image Placeholder 1"/>
+          <p:cNvSpPr>
+            <a:spLocks noGrp="1" noRot="1" noChangeAspect="1"/>
+          </p:cNvSpPr>
+          <p:nvPr>
+            <p:ph type="sldImg"/>
+          </p:nvPr>
+        </p:nvSpPr>
+        <p:spPr/>
+      </p:sp>
+      <p:sp>
+        <p:nvSpPr>
+          <p:cNvPr id="3" name="Notes Placeholder 2"/>
+          <p:cNvSpPr>
+            <a:spLocks noGrp="1"/>
+          </p:cNvSpPr>
+          <p:nvPr>
+            <p:ph type="body" idx="1"/>
+          </p:nvPr>
+        </p:nvSpPr>
+        <p:spPr/>
+        <p:txBody>
+          <a:bodyPr/>
+          <a:lstStyle/>
+          <a:p>
+            <a:r>
+              <a:rPr lang="en-US" b="0" dirty="0">
+                <a:solidFill>
+                  <a:srgbClr val="6796E6"/>
+                </a:solidFill>
+                <a:effectLst/>
+                <a:latin typeface="Consolas" panose="020B0609020204030204" pitchFamily="49" charset="0"/>
+              </a:rPr>
+              <a:t>-</a:t>
+            </a:r>
+            <a:r>
+              <a:rPr lang="en-US" b="0" dirty="0">
+                <a:solidFill>
+                  <a:srgbClr val="CCCCCC"/>
+                </a:solidFill>
+                <a:effectLst/>
+                <a:latin typeface="Consolas" panose="020B0609020204030204" pitchFamily="49" charset="0"/>
+              </a:rPr>
+              <a:t> </a:t>
+            </a:r>
+            <a:r>
+              <a:rPr lang="en-US" b="1" dirty="0">
+                <a:solidFill>
+                  <a:srgbClr val="569CD6"/>
+                </a:solidFill>
+                <a:effectLst/>
+                <a:latin typeface="Consolas" panose="020B0609020204030204" pitchFamily="49" charset="0"/>
+              </a:rPr>
+              <a:t>**</a:t>
+            </a:r>
+            <a:r>
+              <a:rPr lang="en-US" b="1" dirty="0" err="1">
+                <a:solidFill>
+                  <a:srgbClr val="569CD6"/>
+                </a:solidFill>
+                <a:effectLst/>
+                <a:latin typeface="Consolas" panose="020B0609020204030204" pitchFamily="49" charset="0"/>
+              </a:rPr>
+              <a:t>Midjourney</a:t>
+            </a:r>
+            <a:r>
+              <a:rPr lang="en-US" b="1" dirty="0">
+                <a:solidFill>
+                  <a:srgbClr val="569CD6"/>
+                </a:solidFill>
+                <a:effectLst/>
+                <a:latin typeface="Consolas" panose="020B0609020204030204" pitchFamily="49" charset="0"/>
+              </a:rPr>
+              <a:t>, DALL-E:**</a:t>
+            </a:r>
+            <a:r>
+              <a:rPr lang="en-US" b="0" dirty="0">
+                <a:solidFill>
+                  <a:srgbClr val="CCCCCC"/>
+                </a:solidFill>
+                <a:effectLst/>
+                <a:latin typeface="Consolas" panose="020B0609020204030204" pitchFamily="49" charset="0"/>
+              </a:rPr>
+              <a:t> Create stunning images from text prompts</a:t>
+            </a:r>
+          </a:p>
+          <a:p>
+            <a:r>
+              <a:rPr lang="en-US" b="0" dirty="0">
+                <a:solidFill>
+                  <a:srgbClr val="6796E6"/>
+                </a:solidFill>
+                <a:effectLst/>
+                <a:latin typeface="Consolas" panose="020B0609020204030204" pitchFamily="49" charset="0"/>
+              </a:rPr>
+              <a:t>-</a:t>
+            </a:r>
+            <a:r>
+              <a:rPr lang="en-US" b="0" dirty="0">
+                <a:solidFill>
+                  <a:srgbClr val="CCCCCC"/>
+                </a:solidFill>
+                <a:effectLst/>
+                <a:latin typeface="Consolas" panose="020B0609020204030204" pitchFamily="49" charset="0"/>
+              </a:rPr>
+              <a:t> </a:t>
+            </a:r>
+            <a:r>
+              <a:rPr lang="en-US" b="1" dirty="0">
+                <a:solidFill>
+                  <a:srgbClr val="569CD6"/>
+                </a:solidFill>
+                <a:effectLst/>
+                <a:latin typeface="Consolas" panose="020B0609020204030204" pitchFamily="49" charset="0"/>
+              </a:rPr>
+              <a:t>**Canva AI:**</a:t>
+            </a:r>
+            <a:r>
+              <a:rPr lang="en-US" b="0" dirty="0">
+                <a:solidFill>
+                  <a:srgbClr val="CCCCCC"/>
+                </a:solidFill>
+                <a:effectLst/>
+                <a:latin typeface="Consolas" panose="020B0609020204030204" pitchFamily="49" charset="0"/>
+              </a:rPr>
+              <a:t> Auto-generate designs, remove backgrounds, resize instantly</a:t>
+            </a:r>
+          </a:p>
+          <a:p>
+            <a:r>
+              <a:rPr lang="en-US" b="0" dirty="0">
+                <a:solidFill>
+                  <a:srgbClr val="6796E6"/>
+                </a:solidFill>
+                <a:effectLst/>
+                <a:latin typeface="Consolas" panose="020B0609020204030204" pitchFamily="49" charset="0"/>
+              </a:rPr>
+              <a:t>-</a:t>
+            </a:r>
+            <a:r>
+              <a:rPr lang="en-US" b="0" dirty="0">
+                <a:solidFill>
+                  <a:srgbClr val="CCCCCC"/>
+                </a:solidFill>
+                <a:effectLst/>
+                <a:latin typeface="Consolas" panose="020B0609020204030204" pitchFamily="49" charset="0"/>
+              </a:rPr>
+              <a:t> </a:t>
+            </a:r>
+            <a:r>
+              <a:rPr lang="en-US" b="1" dirty="0">
+                <a:solidFill>
+                  <a:srgbClr val="569CD6"/>
+                </a:solidFill>
+                <a:effectLst/>
+                <a:latin typeface="Consolas" panose="020B0609020204030204" pitchFamily="49" charset="0"/>
+              </a:rPr>
+              <a:t>**</a:t>
+            </a:r>
+            <a:r>
+              <a:rPr lang="en-US" b="1" dirty="0" err="1">
+                <a:solidFill>
+                  <a:srgbClr val="569CD6"/>
+                </a:solidFill>
+                <a:effectLst/>
+                <a:latin typeface="Consolas" panose="020B0609020204030204" pitchFamily="49" charset="0"/>
+              </a:rPr>
+              <a:t>CapCut</a:t>
+            </a:r>
+            <a:r>
+              <a:rPr lang="en-US" b="1" dirty="0">
+                <a:solidFill>
+                  <a:srgbClr val="569CD6"/>
+                </a:solidFill>
+                <a:effectLst/>
+                <a:latin typeface="Consolas" panose="020B0609020204030204" pitchFamily="49" charset="0"/>
+              </a:rPr>
+              <a:t>, Runway:**</a:t>
+            </a:r>
+            <a:r>
+              <a:rPr lang="en-US" b="0" dirty="0">
+                <a:solidFill>
+                  <a:srgbClr val="CCCCCC"/>
+                </a:solidFill>
+                <a:effectLst/>
+                <a:latin typeface="Consolas" panose="020B0609020204030204" pitchFamily="49" charset="0"/>
+              </a:rPr>
+              <a:t> AI video editing -- auto-captions, effects, cuts</a:t>
+            </a:r>
+          </a:p>
+          <a:p>
+            <a:r>
+              <a:rPr lang="en-US" b="0" dirty="0">
+                <a:solidFill>
+                  <a:srgbClr val="6796E6"/>
+                </a:solidFill>
+                <a:effectLst/>
+                <a:latin typeface="Consolas" panose="020B0609020204030204" pitchFamily="49" charset="0"/>
+              </a:rPr>
+              <a:t>-</a:t>
+            </a:r>
+            <a:r>
+              <a:rPr lang="en-US" b="0" dirty="0">
+                <a:solidFill>
+                  <a:srgbClr val="CCCCCC"/>
+                </a:solidFill>
+                <a:effectLst/>
+                <a:latin typeface="Consolas" panose="020B0609020204030204" pitchFamily="49" charset="0"/>
+              </a:rPr>
+              <a:t> </a:t>
+            </a:r>
+            <a:r>
+              <a:rPr lang="en-US" b="1" dirty="0">
+                <a:solidFill>
+                  <a:srgbClr val="569CD6"/>
+                </a:solidFill>
+                <a:effectLst/>
+                <a:latin typeface="Consolas" panose="020B0609020204030204" pitchFamily="49" charset="0"/>
+              </a:rPr>
+              <a:t>**AI Reels Scripts:**</a:t>
+            </a:r>
+            <a:r>
+              <a:rPr lang="en-US" b="0" dirty="0">
+                <a:solidFill>
+                  <a:srgbClr val="CCCCCC"/>
+                </a:solidFill>
+                <a:effectLst/>
+                <a:latin typeface="Consolas" panose="020B0609020204030204" pitchFamily="49" charset="0"/>
+              </a:rPr>
+              <a:t> Generate content ideas and scripts in seconds</a:t>
+            </a:r>
+          </a:p>
+          <a:p>
+            <a:br>
+              <a:rPr lang="en-US" b="0" dirty="0">
+                <a:solidFill>
+                  <a:srgbClr val="CCCCCC"/>
+                </a:solidFill>
+                <a:effectLst/>
+                <a:latin typeface="Consolas" panose="020B0609020204030204" pitchFamily="49" charset="0"/>
+              </a:rPr>
+            </a:br>
+            <a:r>
+              <a:rPr lang="en-US" b="1" dirty="0">
+                <a:solidFill>
+                  <a:srgbClr val="569CD6"/>
+                </a:solidFill>
+                <a:effectLst/>
+                <a:latin typeface="Consolas" panose="020B0609020204030204" pitchFamily="49" charset="0"/>
+              </a:rPr>
+              <a:t>**The reality:**</a:t>
+            </a:r>
+            <a:r>
+              <a:rPr lang="en-US" b="0" dirty="0">
+                <a:solidFill>
+                  <a:srgbClr val="CCCCCC"/>
+                </a:solidFill>
+                <a:effectLst/>
+                <a:latin typeface="Consolas" panose="020B0609020204030204" pitchFamily="49" charset="0"/>
+              </a:rPr>
+              <a:t> Creators who understand AI tools produce more content, better content, faster. The tools are free or cheap -- the skill is in using them right.</a:t>
+            </a:r>
+          </a:p>
+          <a:p>
+            <a:endParaRPr lang="en-IN" dirty="0"/>
+          </a:p>
+        </p:txBody>
+      </p:sp>
+      <p:sp>
+        <p:nvSpPr>
+          <p:cNvPr id="4" name="Slide Number Placeholder 3"/>
+          <p:cNvSpPr>
+            <a:spLocks noGrp="1"/>
+          </p:cNvSpPr>
+          <p:nvPr>
+            <p:ph type="sldNum" sz="quarter" idx="5"/>
+          </p:nvPr>
+        </p:nvSpPr>
+        <p:spPr/>
+        <p:txBody>
+          <a:bodyPr/>
+          <a:lstStyle/>
+          <a:p>
+            <a:fld id="{6C7BAAA9-F324-46BB-A8DF-7D9DDBA16B5D}" type="slidenum">
+              <a:rPr lang="en-IN" smtClean="0"/>
+              <a:t>7</a:t>
+            </a:fld>
+            <a:endParaRPr lang="en-IN"/>
+          </a:p>
+        </p:txBody>
+      </p:sp>
+    </p:spTree>
+    <p:extLst>
+      <p:ext uri="{BB962C8B-B14F-4D97-AF65-F5344CB8AC3E}">
+        <p14:creationId xmlns:p14="http://schemas.microsoft.com/office/powerpoint/2010/main" val="1364996377"/>
+      </p:ext>
+    </p:extLst>
+  </p:cSld>
+  <p:clrMapOvr>
+    <a:masterClrMapping/>
+  </p:clrMapOvr>
+</p:notes>
+</file>
+
+<file path=ppt/notesSlides/notesSlide8.xml><?xml version="1.0" encoding="utf-8"?>
+<p:notes xmlns:a="http://schemas.openxmlformats.org/drawingml/2006/main" xmlns:r="http://schemas.openxmlformats.org/officeDocument/2006/relationships" xmlns:p="http://schemas.openxmlformats.org/presentationml/2006/main">
+  <p:cSld>
+    <p:spTree>
+      <p:nvGrpSpPr>
+        <p:cNvPr id="1" name=""/>
+        <p:cNvGrpSpPr/>
+        <p:nvPr/>
+      </p:nvGrpSpPr>
+      <p:grpSpPr>
+        <a:xfrm>
+          <a:off x="0" y="0"/>
+          <a:ext cx="0" cy="0"/>
+          <a:chOff x="0" y="0"/>
+          <a:chExt cx="0" cy="0"/>
+        </a:xfrm>
+      </p:grpSpPr>
+      <p:sp>
+        <p:nvSpPr>
+          <p:cNvPr id="2" name="Slide Image Placeholder 1"/>
+          <p:cNvSpPr>
+            <a:spLocks noGrp="1" noRot="1" noChangeAspect="1"/>
+          </p:cNvSpPr>
+          <p:nvPr>
+            <p:ph type="sldImg"/>
+          </p:nvPr>
+        </p:nvSpPr>
+        <p:spPr/>
+      </p:sp>
+      <p:sp>
+        <p:nvSpPr>
+          <p:cNvPr id="3" name="Notes Placeholder 2"/>
+          <p:cNvSpPr>
+            <a:spLocks noGrp="1"/>
+          </p:cNvSpPr>
+          <p:nvPr>
+            <p:ph type="body" idx="1"/>
+          </p:nvPr>
+        </p:nvSpPr>
+        <p:spPr/>
+        <p:txBody>
+          <a:bodyPr/>
+          <a:lstStyle/>
+          <a:p>
+            <a:r>
+              <a:rPr lang="en-US" b="0" dirty="0">
+                <a:solidFill>
+                  <a:srgbClr val="6796E6"/>
+                </a:solidFill>
+                <a:effectLst/>
+                <a:latin typeface="Consolas" panose="020B0609020204030204" pitchFamily="49" charset="0"/>
+              </a:rPr>
+              <a:t>-</a:t>
+            </a:r>
+            <a:r>
+              <a:rPr lang="en-US" b="0" dirty="0">
+                <a:solidFill>
+                  <a:srgbClr val="CCCCCC"/>
+                </a:solidFill>
+                <a:effectLst/>
+                <a:latin typeface="Consolas" panose="020B0609020204030204" pitchFamily="49" charset="0"/>
+              </a:rPr>
+              <a:t> </a:t>
+            </a:r>
+            <a:r>
+              <a:rPr lang="en-US" b="1" dirty="0">
+                <a:solidFill>
+                  <a:srgbClr val="569CD6"/>
+                </a:solidFill>
+                <a:effectLst/>
+                <a:latin typeface="Consolas" panose="020B0609020204030204" pitchFamily="49" charset="0"/>
+              </a:rPr>
+              <a:t>**AI Threat Detection:**</a:t>
+            </a:r>
+            <a:r>
+              <a:rPr lang="en-US" b="0" dirty="0">
+                <a:solidFill>
+                  <a:srgbClr val="CCCCCC"/>
+                </a:solidFill>
+                <a:effectLst/>
+                <a:latin typeface="Consolas" panose="020B0609020204030204" pitchFamily="49" charset="0"/>
+              </a:rPr>
+              <a:t> Catches attacks that humans would miss</a:t>
+            </a:r>
+          </a:p>
+          <a:p>
+            <a:r>
+              <a:rPr lang="en-US" b="0" dirty="0">
+                <a:solidFill>
+                  <a:srgbClr val="6796E6"/>
+                </a:solidFill>
+                <a:effectLst/>
+                <a:latin typeface="Consolas" panose="020B0609020204030204" pitchFamily="49" charset="0"/>
+              </a:rPr>
+              <a:t>-</a:t>
+            </a:r>
+            <a:r>
+              <a:rPr lang="en-US" b="0" dirty="0">
+                <a:solidFill>
+                  <a:srgbClr val="CCCCCC"/>
+                </a:solidFill>
+                <a:effectLst/>
+                <a:latin typeface="Consolas" panose="020B0609020204030204" pitchFamily="49" charset="0"/>
+              </a:rPr>
+              <a:t> </a:t>
+            </a:r>
+            <a:r>
+              <a:rPr lang="en-US" b="1" dirty="0">
+                <a:solidFill>
+                  <a:srgbClr val="569CD6"/>
+                </a:solidFill>
+                <a:effectLst/>
+                <a:latin typeface="Consolas" panose="020B0609020204030204" pitchFamily="49" charset="0"/>
+              </a:rPr>
+              <a:t>**Anomaly Detection:**</a:t>
+            </a:r>
+            <a:r>
+              <a:rPr lang="en-US" b="0" dirty="0">
+                <a:solidFill>
+                  <a:srgbClr val="CCCCCC"/>
+                </a:solidFill>
+                <a:effectLst/>
+                <a:latin typeface="Consolas" panose="020B0609020204030204" pitchFamily="49" charset="0"/>
+              </a:rPr>
+              <a:t> Spots unusual patterns in network traffic</a:t>
+            </a:r>
+          </a:p>
+          <a:p>
+            <a:r>
+              <a:rPr lang="en-US" b="0" dirty="0">
+                <a:solidFill>
+                  <a:srgbClr val="6796E6"/>
+                </a:solidFill>
+                <a:effectLst/>
+                <a:latin typeface="Consolas" panose="020B0609020204030204" pitchFamily="49" charset="0"/>
+              </a:rPr>
+              <a:t>-</a:t>
+            </a:r>
+            <a:r>
+              <a:rPr lang="en-US" b="0" dirty="0">
+                <a:solidFill>
+                  <a:srgbClr val="CCCCCC"/>
+                </a:solidFill>
+                <a:effectLst/>
+                <a:latin typeface="Consolas" panose="020B0609020204030204" pitchFamily="49" charset="0"/>
+              </a:rPr>
+              <a:t> </a:t>
+            </a:r>
+            <a:r>
+              <a:rPr lang="en-US" b="1" dirty="0">
+                <a:solidFill>
+                  <a:srgbClr val="569CD6"/>
+                </a:solidFill>
+                <a:effectLst/>
+                <a:latin typeface="Consolas" panose="020B0609020204030204" pitchFamily="49" charset="0"/>
+              </a:rPr>
+              <a:t>**Automated Pen Testing:**</a:t>
+            </a:r>
+            <a:r>
+              <a:rPr lang="en-US" b="0" dirty="0">
+                <a:solidFill>
+                  <a:srgbClr val="CCCCCC"/>
+                </a:solidFill>
+                <a:effectLst/>
+                <a:latin typeface="Consolas" panose="020B0609020204030204" pitchFamily="49" charset="0"/>
+              </a:rPr>
+              <a:t> AI finds vulnerabilities before hackers do</a:t>
+            </a:r>
+          </a:p>
+          <a:p>
+            <a:r>
+              <a:rPr lang="en-US" b="0" dirty="0">
+                <a:solidFill>
+                  <a:srgbClr val="6796E6"/>
+                </a:solidFill>
+                <a:effectLst/>
+                <a:latin typeface="Consolas" panose="020B0609020204030204" pitchFamily="49" charset="0"/>
+              </a:rPr>
+              <a:t>-</a:t>
+            </a:r>
+            <a:r>
+              <a:rPr lang="en-US" b="0" dirty="0">
+                <a:solidFill>
+                  <a:srgbClr val="CCCCCC"/>
+                </a:solidFill>
+                <a:effectLst/>
+                <a:latin typeface="Consolas" panose="020B0609020204030204" pitchFamily="49" charset="0"/>
+              </a:rPr>
+              <a:t> </a:t>
+            </a:r>
+            <a:r>
+              <a:rPr lang="en-US" b="1" dirty="0">
+                <a:solidFill>
+                  <a:srgbClr val="569CD6"/>
+                </a:solidFill>
+                <a:effectLst/>
+                <a:latin typeface="Consolas" panose="020B0609020204030204" pitchFamily="49" charset="0"/>
+              </a:rPr>
+              <a:t>**The Arms Race:**</a:t>
+            </a:r>
+            <a:r>
+              <a:rPr lang="en-US" b="0" dirty="0">
+                <a:solidFill>
+                  <a:srgbClr val="CCCCCC"/>
+                </a:solidFill>
+                <a:effectLst/>
+                <a:latin typeface="Consolas" panose="020B0609020204030204" pitchFamily="49" charset="0"/>
+              </a:rPr>
+              <a:t> AI writing malware vs AI defending against it</a:t>
+            </a:r>
+          </a:p>
+          <a:p>
+            <a:br>
+              <a:rPr lang="en-US" b="0" dirty="0">
+                <a:solidFill>
+                  <a:srgbClr val="CCCCCC"/>
+                </a:solidFill>
+                <a:effectLst/>
+                <a:latin typeface="Consolas" panose="020B0609020204030204" pitchFamily="49" charset="0"/>
+              </a:rPr>
+            </a:br>
+            <a:r>
+              <a:rPr lang="en-US" b="1" dirty="0">
+                <a:solidFill>
+                  <a:srgbClr val="569CD6"/>
+                </a:solidFill>
+                <a:effectLst/>
+                <a:latin typeface="Consolas" panose="020B0609020204030204" pitchFamily="49" charset="0"/>
+              </a:rPr>
+              <a:t>**The reality:**</a:t>
+            </a:r>
+            <a:r>
+              <a:rPr lang="en-US" b="0" dirty="0">
+                <a:solidFill>
+                  <a:srgbClr val="CCCCCC"/>
+                </a:solidFill>
+                <a:effectLst/>
+                <a:latin typeface="Consolas" panose="020B0609020204030204" pitchFamily="49" charset="0"/>
+              </a:rPr>
+              <a:t> Security teams can't keep up without AI. And building security tools is one of the highest-paying tech careers.</a:t>
+            </a:r>
+          </a:p>
+          <a:p>
+            <a:br>
+              <a:rPr lang="en-US" b="0" dirty="0">
+                <a:solidFill>
+                  <a:srgbClr val="CCCCCC"/>
+                </a:solidFill>
+                <a:effectLst/>
+                <a:latin typeface="Consolas" panose="020B0609020204030204" pitchFamily="49" charset="0"/>
+              </a:rPr>
+            </a:br>
+            <a:r>
+              <a:rPr lang="en-US" b="0" i="1" dirty="0">
+                <a:solidFill>
+                  <a:srgbClr val="CCCCCC"/>
+                </a:solidFill>
+                <a:effectLst/>
+                <a:latin typeface="Consolas" panose="020B0609020204030204" pitchFamily="49" charset="0"/>
+              </a:rPr>
+              <a:t>*"Remember the Network Sentinel we demoed? That's a real cybersecurity tool. Built with Python."*</a:t>
+            </a:r>
+            <a:endParaRPr lang="en-US" b="0" dirty="0">
+              <a:solidFill>
+                <a:srgbClr val="CCCCCC"/>
+              </a:solidFill>
+              <a:effectLst/>
+              <a:latin typeface="Consolas" panose="020B0609020204030204" pitchFamily="49" charset="0"/>
+            </a:endParaRPr>
+          </a:p>
+          <a:p>
+            <a:endParaRPr lang="en-IN" dirty="0"/>
+          </a:p>
+        </p:txBody>
+      </p:sp>
+      <p:sp>
+        <p:nvSpPr>
+          <p:cNvPr id="4" name="Slide Number Placeholder 3"/>
+          <p:cNvSpPr>
+            <a:spLocks noGrp="1"/>
+          </p:cNvSpPr>
+          <p:nvPr>
+            <p:ph type="sldNum" sz="quarter" idx="5"/>
+          </p:nvPr>
+        </p:nvSpPr>
+        <p:spPr/>
+        <p:txBody>
+          <a:bodyPr/>
+          <a:lstStyle/>
+          <a:p>
+            <a:fld id="{6C7BAAA9-F324-46BB-A8DF-7D9DDBA16B5D}" type="slidenum">
+              <a:rPr lang="en-IN" smtClean="0"/>
+              <a:t>8</a:t>
+            </a:fld>
+            <a:endParaRPr lang="en-IN"/>
+          </a:p>
+        </p:txBody>
+      </p:sp>
+    </p:spTree>
+    <p:extLst>
+      <p:ext uri="{BB962C8B-B14F-4D97-AF65-F5344CB8AC3E}">
+        <p14:creationId xmlns:p14="http://schemas.microsoft.com/office/powerpoint/2010/main" val="2795184669"/>
+      </p:ext>
+    </p:extLst>
+  </p:cSld>
+  <p:clrMapOvr>
+    <a:masterClrMapping/>
+  </p:clrMapOvr>
+</p:notes>
+</file>
+
+<file path=ppt/notesSlides/notesSlide9.xml><?xml version="1.0" encoding="utf-8"?>
+<p:notes xmlns:a="http://schemas.openxmlformats.org/drawingml/2006/main" xmlns:r="http://schemas.openxmlformats.org/officeDocument/2006/relationships" xmlns:p="http://schemas.openxmlformats.org/presentationml/2006/main">
+  <p:cSld>
+    <p:spTree>
+      <p:nvGrpSpPr>
+        <p:cNvPr id="1" name=""/>
+        <p:cNvGrpSpPr/>
+        <p:nvPr/>
+      </p:nvGrpSpPr>
+      <p:grpSpPr>
+        <a:xfrm>
+          <a:off x="0" y="0"/>
+          <a:ext cx="0" cy="0"/>
+          <a:chOff x="0" y="0"/>
+          <a:chExt cx="0" cy="0"/>
+        </a:xfrm>
+      </p:grpSpPr>
+      <p:sp>
+        <p:nvSpPr>
+          <p:cNvPr id="2" name="Slide Image Placeholder 1"/>
+          <p:cNvSpPr>
+            <a:spLocks noGrp="1" noRot="1" noChangeAspect="1"/>
+          </p:cNvSpPr>
+          <p:nvPr>
+            <p:ph type="sldImg"/>
+          </p:nvPr>
+        </p:nvSpPr>
+        <p:spPr/>
+      </p:sp>
+      <p:sp>
+        <p:nvSpPr>
+          <p:cNvPr id="3" name="Notes Placeholder 2"/>
+          <p:cNvSpPr>
+            <a:spLocks noGrp="1"/>
+          </p:cNvSpPr>
+          <p:nvPr>
+            <p:ph type="body" idx="1"/>
+          </p:nvPr>
+        </p:nvSpPr>
+        <p:spPr/>
+        <p:txBody>
+          <a:bodyPr/>
+          <a:lstStyle/>
+          <a:p>
+            <a:r>
+              <a:rPr lang="en-US" b="0" dirty="0">
+                <a:solidFill>
+                  <a:srgbClr val="6796E6"/>
+                </a:solidFill>
+                <a:effectLst/>
+                <a:latin typeface="Consolas" panose="020B0609020204030204" pitchFamily="49" charset="0"/>
+              </a:rPr>
+              <a:t>-</a:t>
+            </a:r>
+            <a:r>
+              <a:rPr lang="en-US" b="0" dirty="0">
+                <a:solidFill>
+                  <a:srgbClr val="CCCCCC"/>
+                </a:solidFill>
+                <a:effectLst/>
+                <a:latin typeface="Consolas" panose="020B0609020204030204" pitchFamily="49" charset="0"/>
+              </a:rPr>
+              <a:t> </a:t>
+            </a:r>
+            <a:r>
+              <a:rPr lang="en-US" b="1" dirty="0">
+                <a:solidFill>
+                  <a:srgbClr val="569CD6"/>
+                </a:solidFill>
+                <a:effectLst/>
+                <a:latin typeface="Consolas" panose="020B0609020204030204" pitchFamily="49" charset="0"/>
+              </a:rPr>
+              <a:t>**Personalized Learning:**</a:t>
+            </a:r>
+            <a:r>
+              <a:rPr lang="en-US" b="0" dirty="0">
+                <a:solidFill>
+                  <a:srgbClr val="CCCCCC"/>
+                </a:solidFill>
+                <a:effectLst/>
+                <a:latin typeface="Consolas" panose="020B0609020204030204" pitchFamily="49" charset="0"/>
+              </a:rPr>
+              <a:t> AI adapts lessons to each student's level</a:t>
+            </a:r>
+          </a:p>
+          <a:p>
+            <a:r>
+              <a:rPr lang="en-US" b="0" dirty="0">
+                <a:solidFill>
+                  <a:srgbClr val="6796E6"/>
+                </a:solidFill>
+                <a:effectLst/>
+                <a:latin typeface="Consolas" panose="020B0609020204030204" pitchFamily="49" charset="0"/>
+              </a:rPr>
+              <a:t>-</a:t>
+            </a:r>
+            <a:r>
+              <a:rPr lang="en-US" b="0" dirty="0">
+                <a:solidFill>
+                  <a:srgbClr val="CCCCCC"/>
+                </a:solidFill>
+                <a:effectLst/>
+                <a:latin typeface="Consolas" panose="020B0609020204030204" pitchFamily="49" charset="0"/>
+              </a:rPr>
+              <a:t> </a:t>
+            </a:r>
+            <a:r>
+              <a:rPr lang="en-US" b="1" dirty="0">
+                <a:solidFill>
+                  <a:srgbClr val="569CD6"/>
+                </a:solidFill>
+                <a:effectLst/>
+                <a:latin typeface="Consolas" panose="020B0609020204030204" pitchFamily="49" charset="0"/>
+              </a:rPr>
+              <a:t>**AI Tutors:**</a:t>
+            </a:r>
+            <a:r>
+              <a:rPr lang="en-US" b="0" dirty="0">
+                <a:solidFill>
+                  <a:srgbClr val="CCCCCC"/>
+                </a:solidFill>
+                <a:effectLst/>
+                <a:latin typeface="Consolas" panose="020B0609020204030204" pitchFamily="49" charset="0"/>
+              </a:rPr>
+              <a:t> Get explanations in any style, any time, any subject</a:t>
+            </a:r>
+          </a:p>
+          <a:p>
+            <a:r>
+              <a:rPr lang="en-US" b="0" dirty="0">
+                <a:solidFill>
+                  <a:srgbClr val="6796E6"/>
+                </a:solidFill>
+                <a:effectLst/>
+                <a:latin typeface="Consolas" panose="020B0609020204030204" pitchFamily="49" charset="0"/>
+              </a:rPr>
+              <a:t>-</a:t>
+            </a:r>
+            <a:r>
+              <a:rPr lang="en-US" b="0" dirty="0">
+                <a:solidFill>
+                  <a:srgbClr val="CCCCCC"/>
+                </a:solidFill>
+                <a:effectLst/>
+                <a:latin typeface="Consolas" panose="020B0609020204030204" pitchFamily="49" charset="0"/>
+              </a:rPr>
+              <a:t> </a:t>
+            </a:r>
+            <a:r>
+              <a:rPr lang="en-US" b="1" dirty="0">
+                <a:solidFill>
+                  <a:srgbClr val="569CD6"/>
+                </a:solidFill>
+                <a:effectLst/>
+                <a:latin typeface="Consolas" panose="020B0609020204030204" pitchFamily="49" charset="0"/>
+              </a:rPr>
+              <a:t>**Smart Assessments:**</a:t>
+            </a:r>
+            <a:r>
+              <a:rPr lang="en-US" b="0" dirty="0">
+                <a:solidFill>
+                  <a:srgbClr val="CCCCCC"/>
+                </a:solidFill>
+                <a:effectLst/>
+                <a:latin typeface="Consolas" panose="020B0609020204030204" pitchFamily="49" charset="0"/>
+              </a:rPr>
+              <a:t> AI generates quizzes, grades answers, gives feedback</a:t>
+            </a:r>
+          </a:p>
+          <a:p>
+            <a:r>
+              <a:rPr lang="en-US" b="0" dirty="0">
+                <a:solidFill>
+                  <a:srgbClr val="6796E6"/>
+                </a:solidFill>
+                <a:effectLst/>
+                <a:latin typeface="Consolas" panose="020B0609020204030204" pitchFamily="49" charset="0"/>
+              </a:rPr>
+              <a:t>-</a:t>
+            </a:r>
+            <a:r>
+              <a:rPr lang="en-US" b="0" dirty="0">
+                <a:solidFill>
+                  <a:srgbClr val="CCCCCC"/>
+                </a:solidFill>
+                <a:effectLst/>
+                <a:latin typeface="Consolas" panose="020B0609020204030204" pitchFamily="49" charset="0"/>
+              </a:rPr>
+              <a:t> </a:t>
+            </a:r>
+            <a:r>
+              <a:rPr lang="en-US" b="1" dirty="0">
+                <a:solidFill>
+                  <a:srgbClr val="569CD6"/>
+                </a:solidFill>
+                <a:effectLst/>
+                <a:latin typeface="Consolas" panose="020B0609020204030204" pitchFamily="49" charset="0"/>
+              </a:rPr>
+              <a:t>**Language Learning:**</a:t>
+            </a:r>
+            <a:r>
+              <a:rPr lang="en-US" b="0" dirty="0">
+                <a:solidFill>
+                  <a:srgbClr val="CCCCCC"/>
+                </a:solidFill>
+                <a:effectLst/>
+                <a:latin typeface="Consolas" panose="020B0609020204030204" pitchFamily="49" charset="0"/>
+              </a:rPr>
+              <a:t> Duolingo's AI adapts difficulty in real-time</a:t>
+            </a:r>
+          </a:p>
+          <a:p>
+            <a:br>
+              <a:rPr lang="en-US" b="0" dirty="0">
+                <a:solidFill>
+                  <a:srgbClr val="CCCCCC"/>
+                </a:solidFill>
+                <a:effectLst/>
+                <a:latin typeface="Consolas" panose="020B0609020204030204" pitchFamily="49" charset="0"/>
+              </a:rPr>
+            </a:br>
+            <a:r>
+              <a:rPr lang="en-US" b="1" dirty="0">
+                <a:solidFill>
+                  <a:srgbClr val="569CD6"/>
+                </a:solidFill>
+                <a:effectLst/>
+                <a:latin typeface="Consolas" panose="020B0609020204030204" pitchFamily="49" charset="0"/>
+              </a:rPr>
+              <a:t>**The reality:**</a:t>
+            </a:r>
+            <a:r>
+              <a:rPr lang="en-US" b="0" dirty="0">
+                <a:solidFill>
+                  <a:srgbClr val="CCCCCC"/>
+                </a:solidFill>
+                <a:effectLst/>
+                <a:latin typeface="Consolas" panose="020B0609020204030204" pitchFamily="49" charset="0"/>
+              </a:rPr>
+              <a:t> The future of education IS AI. And some of you are going to build exactly these tools.</a:t>
+            </a:r>
+          </a:p>
+          <a:p>
+            <a:br>
+              <a:rPr lang="en-US" b="0" dirty="0">
+                <a:solidFill>
+                  <a:srgbClr val="CCCCCC"/>
+                </a:solidFill>
+                <a:effectLst/>
+                <a:latin typeface="Consolas" panose="020B0609020204030204" pitchFamily="49" charset="0"/>
+              </a:rPr>
+            </a:br>
+            <a:r>
+              <a:rPr lang="en-US" b="0" i="1" dirty="0">
+                <a:solidFill>
+                  <a:srgbClr val="CCCCCC"/>
+                </a:solidFill>
+                <a:effectLst/>
+                <a:latin typeface="Consolas" panose="020B0609020204030204" pitchFamily="49" charset="0"/>
+              </a:rPr>
+              <a:t>*"The Quiz Master project? That's not just a project -- it's the future of education in miniature."*</a:t>
+            </a:r>
+            <a:endParaRPr lang="en-US" b="0" dirty="0">
+              <a:solidFill>
+                <a:srgbClr val="CCCCCC"/>
+              </a:solidFill>
+              <a:effectLst/>
+              <a:latin typeface="Consolas" panose="020B0609020204030204" pitchFamily="49" charset="0"/>
+            </a:endParaRPr>
+          </a:p>
+          <a:p>
+            <a:endParaRPr lang="en-IN" dirty="0"/>
+          </a:p>
+        </p:txBody>
+      </p:sp>
+      <p:sp>
+        <p:nvSpPr>
+          <p:cNvPr id="4" name="Slide Number Placeholder 3"/>
+          <p:cNvSpPr>
+            <a:spLocks noGrp="1"/>
+          </p:cNvSpPr>
+          <p:nvPr>
+            <p:ph type="sldNum" sz="quarter" idx="5"/>
+          </p:nvPr>
+        </p:nvSpPr>
+        <p:spPr/>
+        <p:txBody>
+          <a:bodyPr/>
+          <a:lstStyle/>
+          <a:p>
+            <a:fld id="{6C7BAAA9-F324-46BB-A8DF-7D9DDBA16B5D}" type="slidenum">
+              <a:rPr lang="en-IN" smtClean="0"/>
+              <a:t>9</a:t>
+            </a:fld>
+            <a:endParaRPr lang="en-IN"/>
+          </a:p>
+        </p:txBody>
+      </p:sp>
+    </p:spTree>
+    <p:extLst>
+      <p:ext uri="{BB962C8B-B14F-4D97-AF65-F5344CB8AC3E}">
+        <p14:creationId xmlns:p14="http://schemas.microsoft.com/office/powerpoint/2010/main" val="1101593487"/>
+      </p:ext>
+    </p:extLst>
+  </p:cSld>
+  <p:clrMapOvr>
+    <a:masterClrMapping/>
+  </p:clrMapOvr>
+</p:notes>
+</file>
+
 <file path=ppt/slideLayouts/slideLayout1.xml><?xml version="1.0" encoding="utf-8"?>
 <p:sldLayout xmlns:a="http://schemas.openxmlformats.org/drawingml/2006/main" xmlns:r="http://schemas.openxmlformats.org/officeDocument/2006/relationships" xmlns:p="http://schemas.openxmlformats.org/presentationml/2006/main" type="title" preserve="1">
   <p:cSld name="Title Slide">
@@ -315,7 +3830,7 @@
           <a:p>
             <a:fld id="{5BCAD085-E8A6-8845-BD4E-CB4CCA059FC4}" type="datetimeFigureOut">
               <a:rPr lang="en-US" smtClean="0"/>
-              <a:t>4/1/2026</a:t>
+              <a:t>4/3/2026</a:t>
             </a:fld>
             <a:endParaRPr lang="en-US"/>
           </a:p>
@@ -483,7 +3998,7 @@
           <a:p>
             <a:fld id="{5BCAD085-E8A6-8845-BD4E-CB4CCA059FC4}" type="datetimeFigureOut">
               <a:rPr lang="en-US" smtClean="0"/>
-              <a:t>4/1/2026</a:t>
+              <a:t>4/3/2026</a:t>
             </a:fld>
             <a:endParaRPr lang="en-US"/>
           </a:p>
@@ -661,7 +4176,7 @@
           <a:p>
             <a:fld id="{5BCAD085-E8A6-8845-BD4E-CB4CCA059FC4}" type="datetimeFigureOut">
               <a:rPr lang="en-US" smtClean="0"/>
-              <a:t>4/1/2026</a:t>
+              <a:t>4/3/2026</a:t>
             </a:fld>
             <a:endParaRPr lang="en-US"/>
           </a:p>
@@ -829,7 +4344,7 @@
           <a:p>
             <a:fld id="{5BCAD085-E8A6-8845-BD4E-CB4CCA059FC4}" type="datetimeFigureOut">
               <a:rPr lang="en-US" smtClean="0"/>
-              <a:t>4/1/2026</a:t>
+              <a:t>4/3/2026</a:t>
             </a:fld>
             <a:endParaRPr lang="en-US"/>
           </a:p>
@@ -1074,7 +4589,7 @@
           <a:p>
             <a:fld id="{5BCAD085-E8A6-8845-BD4E-CB4CCA059FC4}" type="datetimeFigureOut">
               <a:rPr lang="en-US" smtClean="0"/>
-              <a:t>4/1/2026</a:t>
+              <a:t>4/3/2026</a:t>
             </a:fld>
             <a:endParaRPr lang="en-US"/>
           </a:p>
@@ -1359,7 +4874,7 @@
           <a:p>
             <a:fld id="{5BCAD085-E8A6-8845-BD4E-CB4CCA059FC4}" type="datetimeFigureOut">
               <a:rPr lang="en-US" smtClean="0"/>
-              <a:t>4/1/2026</a:t>
+              <a:t>4/3/2026</a:t>
             </a:fld>
             <a:endParaRPr lang="en-US"/>
           </a:p>
@@ -1778,7 +5293,7 @@
           <a:p>
             <a:fld id="{5BCAD085-E8A6-8845-BD4E-CB4CCA059FC4}" type="datetimeFigureOut">
               <a:rPr lang="en-US" smtClean="0"/>
-              <a:t>4/1/2026</a:t>
+              <a:t>4/3/2026</a:t>
             </a:fld>
             <a:endParaRPr lang="en-US"/>
           </a:p>
@@ -1895,7 +5410,7 @@
           <a:p>
             <a:fld id="{5BCAD085-E8A6-8845-BD4E-CB4CCA059FC4}" type="datetimeFigureOut">
               <a:rPr lang="en-US" smtClean="0"/>
-              <a:t>4/1/2026</a:t>
+              <a:t>4/3/2026</a:t>
             </a:fld>
             <a:endParaRPr lang="en-US"/>
           </a:p>
@@ -1990,7 +5505,7 @@
           <a:p>
             <a:fld id="{5BCAD085-E8A6-8845-BD4E-CB4CCA059FC4}" type="datetimeFigureOut">
               <a:rPr lang="en-US" smtClean="0"/>
-              <a:t>4/1/2026</a:t>
+              <a:t>4/3/2026</a:t>
             </a:fld>
             <a:endParaRPr lang="en-US"/>
           </a:p>
@@ -2265,7 +5780,7 @@
           <a:p>
             <a:fld id="{5BCAD085-E8A6-8845-BD4E-CB4CCA059FC4}" type="datetimeFigureOut">
               <a:rPr lang="en-US" smtClean="0"/>
-              <a:t>4/1/2026</a:t>
+              <a:t>4/3/2026</a:t>
             </a:fld>
             <a:endParaRPr lang="en-US"/>
           </a:p>
@@ -2517,7 +6032,7 @@
           <a:p>
             <a:fld id="{5BCAD085-E8A6-8845-BD4E-CB4CCA059FC4}" type="datetimeFigureOut">
               <a:rPr lang="en-US" smtClean="0"/>
-              <a:t>4/1/2026</a:t>
+              <a:t>4/3/2026</a:t>
             </a:fld>
             <a:endParaRPr lang="en-US"/>
           </a:p>
@@ -2728,7 +6243,7 @@
           <a:p>
             <a:fld id="{5BCAD085-E8A6-8845-BD4E-CB4CCA059FC4}" type="datetimeFigureOut">
               <a:rPr lang="en-US" smtClean="0"/>
-              <a:t>4/1/2026</a:t>
+              <a:t>4/3/2026</a:t>
             </a:fld>
             <a:endParaRPr lang="en-US"/>
           </a:p>
@@ -10678,4 +14193,299 @@
   </a:objectDefaults>
   <a:extraClrSchemeLst/>
 </a:theme>
+</file>
+
+<file path=ppt/theme/theme2.xml><?xml version="1.0" encoding="utf-8"?>
+<a:theme xmlns:a="http://schemas.openxmlformats.org/drawingml/2006/main" name="Office Theme">
+  <a:themeElements>
+    <a:clrScheme name="Office">
+      <a:dk1>
+        <a:sysClr val="windowText" lastClr="000000"/>
+      </a:dk1>
+      <a:lt1>
+        <a:sysClr val="window" lastClr="FFFFFF"/>
+      </a:lt1>
+      <a:dk2>
+        <a:srgbClr val="44546A"/>
+      </a:dk2>
+      <a:lt2>
+        <a:srgbClr val="E7E6E6"/>
+      </a:lt2>
+      <a:accent1>
+        <a:srgbClr val="4472C4"/>
+      </a:accent1>
+      <a:accent2>
+        <a:srgbClr val="ED7D31"/>
+      </a:accent2>
+      <a:accent3>
+        <a:srgbClr val="A5A5A5"/>
+      </a:accent3>
+      <a:accent4>
+        <a:srgbClr val="FFC000"/>
+      </a:accent4>
+      <a:accent5>
+        <a:srgbClr val="5B9BD5"/>
+      </a:accent5>
+      <a:accent6>
+        <a:srgbClr val="70AD47"/>
+      </a:accent6>
+      <a:hlink>
+        <a:srgbClr val="0563C1"/>
+      </a:hlink>
+      <a:folHlink>
+        <a:srgbClr val="954F72"/>
+      </a:folHlink>
+    </a:clrScheme>
+    <a:fontScheme name="Office">
+      <a:majorFont>
+        <a:latin typeface="Calibri Light" panose="020F0302020204030204"/>
+        <a:ea typeface=""/>
+        <a:cs typeface=""/>
+        <a:font script="Jpan" typeface="游ゴシック Light"/>
+        <a:font script="Hang" typeface="맑은 고딕"/>
+        <a:font script="Hans" typeface="等线 Light"/>
+        <a:font script="Hant" typeface="新細明體"/>
+        <a:font script="Arab" typeface="Times New Roman"/>
+        <a:font script="Hebr" typeface="Times New Roman"/>
+        <a:font script="Thai" typeface="Angsana New"/>
+        <a:font script="Ethi" typeface="Nyala"/>
+        <a:font script="Beng" typeface="Vrinda"/>
+        <a:font script="Gujr" typeface="Shruti"/>
+        <a:font script="Khmr" typeface="MoolBoran"/>
+        <a:font script="Knda" typeface="Tunga"/>
+        <a:font script="Guru" typeface="Raavi"/>
+        <a:font script="Cans" typeface="Euphemia"/>
+        <a:font script="Cher" typeface="Plantagenet Cherokee"/>
+        <a:font script="Yiii" typeface="Microsoft Yi Baiti"/>
+        <a:font script="Tibt" typeface="Microsoft Himalaya"/>
+        <a:font script="Thaa" typeface="MV Boli"/>
+        <a:font script="Deva" typeface="Mangal"/>
+        <a:font script="Telu" typeface="Gautami"/>
+        <a:font script="Taml" typeface="Latha"/>
+        <a:font script="Syrc" typeface="Estrangelo Edessa"/>
+        <a:font script="Orya" typeface="Kalinga"/>
+        <a:font script="Mlym" typeface="Kartika"/>
+        <a:font script="Laoo" typeface="DokChampa"/>
+        <a:font script="Sinh" typeface="Iskoola Pota"/>
+        <a:font script="Mong" typeface="Mongolian Baiti"/>
+        <a:font script="Viet" typeface="Times New Roman"/>
+        <a:font script="Uigh" typeface="Microsoft Uighur"/>
+        <a:font script="Geor" typeface="Sylfaen"/>
+        <a:font script="Armn" typeface="Arial"/>
+        <a:font script="Bugi" typeface="Leelawadee UI"/>
+        <a:font script="Bopo" typeface="Microsoft JhengHei"/>
+        <a:font script="Java" typeface="Javanese Text"/>
+        <a:font script="Lisu" typeface="Segoe UI"/>
+        <a:font script="Mymr" typeface="Myanmar Text"/>
+        <a:font script="Nkoo" typeface="Ebrima"/>
+        <a:font script="Olck" typeface="Nirmala UI"/>
+        <a:font script="Osma" typeface="Ebrima"/>
+        <a:font script="Phag" typeface="Phagspa"/>
+        <a:font script="Syrn" typeface="Estrangelo Edessa"/>
+        <a:font script="Syrj" typeface="Estrangelo Edessa"/>
+        <a:font script="Syre" typeface="Estrangelo Edessa"/>
+        <a:font script="Sora" typeface="Nirmala UI"/>
+        <a:font script="Tale" typeface="Microsoft Tai Le"/>
+        <a:font script="Talu" typeface="Microsoft New Tai Lue"/>
+        <a:font script="Tfng" typeface="Ebrima"/>
+      </a:majorFont>
+      <a:minorFont>
+        <a:latin typeface="Calibri" panose="020F0502020204030204"/>
+        <a:ea typeface=""/>
+        <a:cs typeface=""/>
+        <a:font script="Jpan" typeface="游ゴシック"/>
+        <a:font script="Hang" typeface="맑은 고딕"/>
+        <a:font script="Hans" typeface="等线"/>
+        <a:font script="Hant" typeface="新細明體"/>
+        <a:font script="Arab" typeface="Arial"/>
+        <a:font script="Hebr" typeface="Arial"/>
+        <a:font script="Thai" typeface="Cordia New"/>
+        <a:font script="Ethi" typeface="Nyala"/>
+        <a:font script="Beng" typeface="Vrinda"/>
+        <a:font script="Gujr" typeface="Shruti"/>
+        <a:font script="Khmr" typeface="DaunPenh"/>
+        <a:font script="Knda" typeface="Tunga"/>
+        <a:font script="Guru" typeface="Raavi"/>
+        <a:font script="Cans" typeface="Euphemia"/>
+        <a:font script="Cher" typeface="Plantagenet Cherokee"/>
+        <a:font script="Yiii" typeface="Microsoft Yi Baiti"/>
+        <a:font script="Tibt" typeface="Microsoft Himalaya"/>
+        <a:font script="Thaa" typeface="MV Boli"/>
+        <a:font script="Deva" typeface="Mangal"/>
+        <a:font script="Telu" typeface="Gautami"/>
+        <a:font script="Taml" typeface="Latha"/>
+        <a:font script="Syrc" typeface="Estrangelo Edessa"/>
+        <a:font script="Orya" typeface="Kalinga"/>
+        <a:font script="Mlym" typeface="Kartika"/>
+        <a:font script="Laoo" typeface="DokChampa"/>
+        <a:font script="Sinh" typeface="Iskoola Pota"/>
+        <a:font script="Mong" typeface="Mongolian Baiti"/>
+        <a:font script="Viet" typeface="Arial"/>
+        <a:font script="Uigh" typeface="Microsoft Uighur"/>
+        <a:font script="Geor" typeface="Sylfaen"/>
+        <a:font script="Armn" typeface="Arial"/>
+        <a:font script="Bugi" typeface="Leelawadee UI"/>
+        <a:font script="Bopo" typeface="Microsoft JhengHei"/>
+        <a:font script="Java" typeface="Javanese Text"/>
+        <a:font script="Lisu" typeface="Segoe UI"/>
+        <a:font script="Mymr" typeface="Myanmar Text"/>
+        <a:font script="Nkoo" typeface="Ebrima"/>
+        <a:font script="Olck" typeface="Nirmala UI"/>
+        <a:font script="Osma" typeface="Ebrima"/>
+        <a:font script="Phag" typeface="Phagspa"/>
+        <a:font script="Syrn" typeface="Estrangelo Edessa"/>
+        <a:font script="Syrj" typeface="Estrangelo Edessa"/>
+        <a:font script="Syre" typeface="Estrangelo Edessa"/>
+        <a:font script="Sora" typeface="Nirmala UI"/>
+        <a:font script="Tale" typeface="Microsoft Tai Le"/>
+        <a:font script="Talu" typeface="Microsoft New Tai Lue"/>
+        <a:font script="Tfng" typeface="Ebrima"/>
+      </a:minorFont>
+    </a:fontScheme>
+    <a:fmtScheme name="Office">
+      <a:fillStyleLst>
+        <a:solidFill>
+          <a:schemeClr val="phClr"/>
+        </a:solidFill>
+        <a:gradFill rotWithShape="1">
+          <a:gsLst>
+            <a:gs pos="0">
+              <a:schemeClr val="phClr">
+                <a:lumMod val="110000"/>
+                <a:satMod val="105000"/>
+                <a:tint val="67000"/>
+              </a:schemeClr>
+            </a:gs>
+            <a:gs pos="50000">
+              <a:schemeClr val="phClr">
+                <a:lumMod val="105000"/>
+                <a:satMod val="103000"/>
+                <a:tint val="73000"/>
+              </a:schemeClr>
+            </a:gs>
+            <a:gs pos="100000">
+              <a:schemeClr val="phClr">
+                <a:lumMod val="105000"/>
+                <a:satMod val="109000"/>
+                <a:tint val="81000"/>
+              </a:schemeClr>
+            </a:gs>
+          </a:gsLst>
+          <a:lin ang="5400000" scaled="0"/>
+        </a:gradFill>
+        <a:gradFill rotWithShape="1">
+          <a:gsLst>
+            <a:gs pos="0">
+              <a:schemeClr val="phClr">
+                <a:satMod val="103000"/>
+                <a:lumMod val="102000"/>
+                <a:tint val="94000"/>
+              </a:schemeClr>
+            </a:gs>
+            <a:gs pos="50000">
+              <a:schemeClr val="phClr">
+                <a:satMod val="110000"/>
+                <a:lumMod val="100000"/>
+                <a:shade val="100000"/>
+              </a:schemeClr>
+            </a:gs>
+            <a:gs pos="100000">
+              <a:schemeClr val="phClr">
+                <a:lumMod val="99000"/>
+                <a:satMod val="120000"/>
+                <a:shade val="78000"/>
+              </a:schemeClr>
+            </a:gs>
+          </a:gsLst>
+          <a:lin ang="5400000" scaled="0"/>
+        </a:gradFill>
+      </a:fillStyleLst>
+      <a:lnStyleLst>
+        <a:ln w="6350" cap="flat" cmpd="sng" algn="ctr">
+          <a:solidFill>
+            <a:schemeClr val="phClr"/>
+          </a:solidFill>
+          <a:prstDash val="solid"/>
+          <a:miter lim="800000"/>
+        </a:ln>
+        <a:ln w="12700" cap="flat" cmpd="sng" algn="ctr">
+          <a:solidFill>
+            <a:schemeClr val="phClr"/>
+          </a:solidFill>
+          <a:prstDash val="solid"/>
+          <a:miter lim="800000"/>
+        </a:ln>
+        <a:ln w="19050" cap="flat" cmpd="sng" algn="ctr">
+          <a:solidFill>
+            <a:schemeClr val="phClr"/>
+          </a:solidFill>
+          <a:prstDash val="solid"/>
+          <a:miter lim="800000"/>
+        </a:ln>
+      </a:lnStyleLst>
+      <a:effectStyleLst>
+        <a:effectStyle>
+          <a:effectLst/>
+        </a:effectStyle>
+        <a:effectStyle>
+          <a:effectLst/>
+        </a:effectStyle>
+        <a:effectStyle>
+          <a:effectLst>
+            <a:outerShdw blurRad="57150" dist="19050" dir="5400000" algn="ctr" rotWithShape="0">
+              <a:srgbClr val="000000">
+                <a:alpha val="63000"/>
+              </a:srgbClr>
+            </a:outerShdw>
+          </a:effectLst>
+        </a:effectStyle>
+      </a:effectStyleLst>
+      <a:bgFillStyleLst>
+        <a:solidFill>
+          <a:schemeClr val="phClr"/>
+        </a:solidFill>
+        <a:solidFill>
+          <a:schemeClr val="phClr">
+            <a:tint val="95000"/>
+            <a:satMod val="170000"/>
+          </a:schemeClr>
+        </a:solidFill>
+        <a:gradFill rotWithShape="1">
+          <a:gsLst>
+            <a:gs pos="0">
+              <a:schemeClr val="phClr">
+                <a:tint val="93000"/>
+                <a:satMod val="150000"/>
+                <a:shade val="98000"/>
+                <a:lumMod val="102000"/>
+              </a:schemeClr>
+            </a:gs>
+            <a:gs pos="50000">
+              <a:schemeClr val="phClr">
+                <a:tint val="98000"/>
+                <a:satMod val="130000"/>
+                <a:shade val="90000"/>
+                <a:lumMod val="103000"/>
+              </a:schemeClr>
+            </a:gs>
+            <a:gs pos="100000">
+              <a:schemeClr val="phClr">
+                <a:shade val="63000"/>
+                <a:satMod val="120000"/>
+              </a:schemeClr>
+            </a:gs>
+          </a:gsLst>
+          <a:lin ang="5400000" scaled="0"/>
+        </a:gradFill>
+      </a:bgFillStyleLst>
+    </a:fmtScheme>
+  </a:themeElements>
+  <a:objectDefaults/>
+  <a:extraClrSchemeLst/>
+  <a:extLst>
+    <a:ext uri="{05A4C25C-085E-4340-85A3-A5531E510DB2}">
+      <thm15:themeFamily xmlns:thm15="http://schemas.microsoft.com/office/thememl/2012/main" name="Office Theme" id="{62F939B6-93AF-4DB8-9C6B-D6C7DFDC589F}" vid="{4A3C46E8-61CC-4603-A589-7422A47A8E4A}"/>
+    </a:ext>
+  </a:extLst>
+</a:theme>
 </file>